--- a/Final_project.pptx
+++ b/Final_project.pptx
@@ -4,11 +4,14 @@
   <p:sldMasterIdLst>
     <p:sldMasterId id="2147483660" r:id="rId1"/>
   </p:sldMasterIdLst>
+  <p:notesMasterIdLst>
+    <p:notesMasterId r:id="rId6"/>
+  </p:notesMasterIdLst>
   <p:sldIdLst>
     <p:sldId id="258" r:id="rId2"/>
     <p:sldId id="260" r:id="rId3"/>
-    <p:sldId id="261" r:id="rId4"/>
-    <p:sldId id="262" r:id="rId5"/>
+    <p:sldId id="263" r:id="rId4"/>
+    <p:sldId id="264" r:id="rId5"/>
   </p:sldIdLst>
   <p:sldSz cx="12192000" cy="6858000"/>
   <p:notesSz cx="6858000" cy="9144000"/>
@@ -107,7 +110,661 @@
       </a:defRPr>
     </a:lvl9pPr>
   </p:defaultTextStyle>
+  <p:extLst>
+    <p:ext uri="{EFAFB233-063F-42B5-8137-9DF3F51BA10A}">
+      <p15:sldGuideLst xmlns:p15="http://schemas.microsoft.com/office/powerpoint/2012/main"/>
+    </p:ext>
+  </p:extLst>
 </p:presentation>
+</file>
+
+<file path=ppt/notesMasters/notesMaster1.xml><?xml version="1.0" encoding="utf-8"?>
+<p:notesMaster xmlns:a="http://schemas.openxmlformats.org/drawingml/2006/main" xmlns:r="http://schemas.openxmlformats.org/officeDocument/2006/relationships" xmlns:p="http://schemas.openxmlformats.org/presentationml/2006/main">
+  <p:cSld>
+    <p:bg>
+      <p:bgRef idx="1001">
+        <a:schemeClr val="bg1"/>
+      </p:bgRef>
+    </p:bg>
+    <p:spTree>
+      <p:nvGrpSpPr>
+        <p:cNvPr id="1" name=""/>
+        <p:cNvGrpSpPr/>
+        <p:nvPr/>
+      </p:nvGrpSpPr>
+      <p:grpSpPr>
+        <a:xfrm>
+          <a:off x="0" y="0"/>
+          <a:ext cx="0" cy="0"/>
+          <a:chOff x="0" y="0"/>
+          <a:chExt cx="0" cy="0"/>
+        </a:xfrm>
+      </p:grpSpPr>
+      <p:sp>
+        <p:nvSpPr>
+          <p:cNvPr id="2" name="Header Placeholder 1"/>
+          <p:cNvSpPr>
+            <a:spLocks noGrp="1"/>
+          </p:cNvSpPr>
+          <p:nvPr>
+            <p:ph type="hdr" sz="quarter"/>
+          </p:nvPr>
+        </p:nvSpPr>
+        <p:spPr>
+          <a:xfrm>
+            <a:off x="0" y="0"/>
+            <a:ext cx="2971800" cy="458788"/>
+          </a:xfrm>
+          <a:prstGeom prst="rect">
+            <a:avLst/>
+          </a:prstGeom>
+        </p:spPr>
+        <p:txBody>
+          <a:bodyPr vert="horz" lIns="91440" tIns="45720" rIns="91440" bIns="45720" rtlCol="0"/>
+          <a:lstStyle>
+            <a:lvl1pPr algn="l">
+              <a:defRPr sz="1200"/>
+            </a:lvl1pPr>
+          </a:lstStyle>
+          <a:p>
+            <a:endParaRPr lang="en-GB"/>
+          </a:p>
+        </p:txBody>
+      </p:sp>
+      <p:sp>
+        <p:nvSpPr>
+          <p:cNvPr id="3" name="Date Placeholder 2"/>
+          <p:cNvSpPr>
+            <a:spLocks noGrp="1"/>
+          </p:cNvSpPr>
+          <p:nvPr>
+            <p:ph type="dt" idx="1"/>
+          </p:nvPr>
+        </p:nvSpPr>
+        <p:spPr>
+          <a:xfrm>
+            <a:off x="3884613" y="0"/>
+            <a:ext cx="2971800" cy="458788"/>
+          </a:xfrm>
+          <a:prstGeom prst="rect">
+            <a:avLst/>
+          </a:prstGeom>
+        </p:spPr>
+        <p:txBody>
+          <a:bodyPr vert="horz" lIns="91440" tIns="45720" rIns="91440" bIns="45720" rtlCol="0"/>
+          <a:lstStyle>
+            <a:lvl1pPr algn="r">
+              <a:defRPr sz="1200"/>
+            </a:lvl1pPr>
+          </a:lstStyle>
+          <a:p>
+            <a:fld id="{96F33D5B-D216-42FE-91A5-6251786E7EF7}" type="datetimeFigureOut">
+              <a:rPr lang="en-GB" smtClean="0"/>
+              <a:t>27/02/2026</a:t>
+            </a:fld>
+            <a:endParaRPr lang="en-GB"/>
+          </a:p>
+        </p:txBody>
+      </p:sp>
+      <p:sp>
+        <p:nvSpPr>
+          <p:cNvPr id="4" name="Slide Image Placeholder 3"/>
+          <p:cNvSpPr>
+            <a:spLocks noGrp="1" noRot="1" noChangeAspect="1"/>
+          </p:cNvSpPr>
+          <p:nvPr>
+            <p:ph type="sldImg" idx="2"/>
+          </p:nvPr>
+        </p:nvSpPr>
+        <p:spPr>
+          <a:xfrm>
+            <a:off x="685800" y="1143000"/>
+            <a:ext cx="5486400" cy="3086100"/>
+          </a:xfrm>
+          <a:prstGeom prst="rect">
+            <a:avLst/>
+          </a:prstGeom>
+          <a:noFill/>
+          <a:ln w="12700">
+            <a:solidFill>
+              <a:prstClr val="black"/>
+            </a:solidFill>
+          </a:ln>
+        </p:spPr>
+        <p:txBody>
+          <a:bodyPr vert="horz" lIns="91440" tIns="45720" rIns="91440" bIns="45720" rtlCol="0" anchor="ctr"/>
+          <a:lstStyle/>
+          <a:p>
+            <a:endParaRPr lang="en-GB"/>
+          </a:p>
+        </p:txBody>
+      </p:sp>
+      <p:sp>
+        <p:nvSpPr>
+          <p:cNvPr id="5" name="Notes Placeholder 4"/>
+          <p:cNvSpPr>
+            <a:spLocks noGrp="1"/>
+          </p:cNvSpPr>
+          <p:nvPr>
+            <p:ph type="body" sz="quarter" idx="3"/>
+          </p:nvPr>
+        </p:nvSpPr>
+        <p:spPr>
+          <a:xfrm>
+            <a:off x="685800" y="4400550"/>
+            <a:ext cx="5486400" cy="3600450"/>
+          </a:xfrm>
+          <a:prstGeom prst="rect">
+            <a:avLst/>
+          </a:prstGeom>
+        </p:spPr>
+        <p:txBody>
+          <a:bodyPr vert="horz" lIns="91440" tIns="45720" rIns="91440" bIns="45720" rtlCol="0"/>
+          <a:lstStyle/>
+          <a:p>
+            <a:pPr lvl="0"/>
+            <a:r>
+              <a:rPr lang="en-GB"/>
+              <a:t>Click to edit Master text styles</a:t>
+            </a:r>
+          </a:p>
+          <a:p>
+            <a:pPr lvl="1"/>
+            <a:r>
+              <a:rPr lang="en-GB"/>
+              <a:t>Second level</a:t>
+            </a:r>
+          </a:p>
+          <a:p>
+            <a:pPr lvl="2"/>
+            <a:r>
+              <a:rPr lang="en-GB"/>
+              <a:t>Third level</a:t>
+            </a:r>
+          </a:p>
+          <a:p>
+            <a:pPr lvl="3"/>
+            <a:r>
+              <a:rPr lang="en-GB"/>
+              <a:t>Fourth level</a:t>
+            </a:r>
+          </a:p>
+          <a:p>
+            <a:pPr lvl="4"/>
+            <a:r>
+              <a:rPr lang="en-GB"/>
+              <a:t>Fifth level</a:t>
+            </a:r>
+          </a:p>
+        </p:txBody>
+      </p:sp>
+      <p:sp>
+        <p:nvSpPr>
+          <p:cNvPr id="6" name="Footer Placeholder 5"/>
+          <p:cNvSpPr>
+            <a:spLocks noGrp="1"/>
+          </p:cNvSpPr>
+          <p:nvPr>
+            <p:ph type="ftr" sz="quarter" idx="4"/>
+          </p:nvPr>
+        </p:nvSpPr>
+        <p:spPr>
+          <a:xfrm>
+            <a:off x="0" y="8685213"/>
+            <a:ext cx="2971800" cy="458787"/>
+          </a:xfrm>
+          <a:prstGeom prst="rect">
+            <a:avLst/>
+          </a:prstGeom>
+        </p:spPr>
+        <p:txBody>
+          <a:bodyPr vert="horz" lIns="91440" tIns="45720" rIns="91440" bIns="45720" rtlCol="0" anchor="b"/>
+          <a:lstStyle>
+            <a:lvl1pPr algn="l">
+              <a:defRPr sz="1200"/>
+            </a:lvl1pPr>
+          </a:lstStyle>
+          <a:p>
+            <a:endParaRPr lang="en-GB"/>
+          </a:p>
+        </p:txBody>
+      </p:sp>
+      <p:sp>
+        <p:nvSpPr>
+          <p:cNvPr id="7" name="Slide Number Placeholder 6"/>
+          <p:cNvSpPr>
+            <a:spLocks noGrp="1"/>
+          </p:cNvSpPr>
+          <p:nvPr>
+            <p:ph type="sldNum" sz="quarter" idx="5"/>
+          </p:nvPr>
+        </p:nvSpPr>
+        <p:spPr>
+          <a:xfrm>
+            <a:off x="3884613" y="8685213"/>
+            <a:ext cx="2971800" cy="458787"/>
+          </a:xfrm>
+          <a:prstGeom prst="rect">
+            <a:avLst/>
+          </a:prstGeom>
+        </p:spPr>
+        <p:txBody>
+          <a:bodyPr vert="horz" lIns="91440" tIns="45720" rIns="91440" bIns="45720" rtlCol="0" anchor="b"/>
+          <a:lstStyle>
+            <a:lvl1pPr algn="r">
+              <a:defRPr sz="1200"/>
+            </a:lvl1pPr>
+          </a:lstStyle>
+          <a:p>
+            <a:fld id="{A78CEBD5-A753-4615-873F-38024EBDB2D8}" type="slidenum">
+              <a:rPr lang="en-GB" smtClean="0"/>
+              <a:t>‹#›</a:t>
+            </a:fld>
+            <a:endParaRPr lang="en-GB"/>
+          </a:p>
+        </p:txBody>
+      </p:sp>
+    </p:spTree>
+    <p:extLst>
+      <p:ext uri="{BB962C8B-B14F-4D97-AF65-F5344CB8AC3E}">
+        <p14:creationId xmlns:p14="http://schemas.microsoft.com/office/powerpoint/2010/main" val="1988550732"/>
+      </p:ext>
+    </p:extLst>
+  </p:cSld>
+  <p:clrMap bg1="lt1" tx1="dk1" bg2="lt2" tx2="dk2" accent1="accent1" accent2="accent2" accent3="accent3" accent4="accent4" accent5="accent5" accent6="accent6" hlink="hlink" folHlink="folHlink"/>
+  <p:notesStyle>
+    <a:lvl1pPr marL="0" algn="l" defTabSz="914400" rtl="0" eaLnBrk="1" latinLnBrk="0" hangingPunct="1">
+      <a:defRPr sz="1200" kern="1200">
+        <a:solidFill>
+          <a:schemeClr val="tx1"/>
+        </a:solidFill>
+        <a:latin typeface="+mn-lt"/>
+        <a:ea typeface="+mn-ea"/>
+        <a:cs typeface="+mn-cs"/>
+      </a:defRPr>
+    </a:lvl1pPr>
+    <a:lvl2pPr marL="457200" algn="l" defTabSz="914400" rtl="0" eaLnBrk="1" latinLnBrk="0" hangingPunct="1">
+      <a:defRPr sz="1200" kern="1200">
+        <a:solidFill>
+          <a:schemeClr val="tx1"/>
+        </a:solidFill>
+        <a:latin typeface="+mn-lt"/>
+        <a:ea typeface="+mn-ea"/>
+        <a:cs typeface="+mn-cs"/>
+      </a:defRPr>
+    </a:lvl2pPr>
+    <a:lvl3pPr marL="914400" algn="l" defTabSz="914400" rtl="0" eaLnBrk="1" latinLnBrk="0" hangingPunct="1">
+      <a:defRPr sz="1200" kern="1200">
+        <a:solidFill>
+          <a:schemeClr val="tx1"/>
+        </a:solidFill>
+        <a:latin typeface="+mn-lt"/>
+        <a:ea typeface="+mn-ea"/>
+        <a:cs typeface="+mn-cs"/>
+      </a:defRPr>
+    </a:lvl3pPr>
+    <a:lvl4pPr marL="1371600" algn="l" defTabSz="914400" rtl="0" eaLnBrk="1" latinLnBrk="0" hangingPunct="1">
+      <a:defRPr sz="1200" kern="1200">
+        <a:solidFill>
+          <a:schemeClr val="tx1"/>
+        </a:solidFill>
+        <a:latin typeface="+mn-lt"/>
+        <a:ea typeface="+mn-ea"/>
+        <a:cs typeface="+mn-cs"/>
+      </a:defRPr>
+    </a:lvl4pPr>
+    <a:lvl5pPr marL="1828800" algn="l" defTabSz="914400" rtl="0" eaLnBrk="1" latinLnBrk="0" hangingPunct="1">
+      <a:defRPr sz="1200" kern="1200">
+        <a:solidFill>
+          <a:schemeClr val="tx1"/>
+        </a:solidFill>
+        <a:latin typeface="+mn-lt"/>
+        <a:ea typeface="+mn-ea"/>
+        <a:cs typeface="+mn-cs"/>
+      </a:defRPr>
+    </a:lvl5pPr>
+    <a:lvl6pPr marL="2286000" algn="l" defTabSz="914400" rtl="0" eaLnBrk="1" latinLnBrk="0" hangingPunct="1">
+      <a:defRPr sz="1200" kern="1200">
+        <a:solidFill>
+          <a:schemeClr val="tx1"/>
+        </a:solidFill>
+        <a:latin typeface="+mn-lt"/>
+        <a:ea typeface="+mn-ea"/>
+        <a:cs typeface="+mn-cs"/>
+      </a:defRPr>
+    </a:lvl6pPr>
+    <a:lvl7pPr marL="2743200" algn="l" defTabSz="914400" rtl="0" eaLnBrk="1" latinLnBrk="0" hangingPunct="1">
+      <a:defRPr sz="1200" kern="1200">
+        <a:solidFill>
+          <a:schemeClr val="tx1"/>
+        </a:solidFill>
+        <a:latin typeface="+mn-lt"/>
+        <a:ea typeface="+mn-ea"/>
+        <a:cs typeface="+mn-cs"/>
+      </a:defRPr>
+    </a:lvl7pPr>
+    <a:lvl8pPr marL="3200400" algn="l" defTabSz="914400" rtl="0" eaLnBrk="1" latinLnBrk="0" hangingPunct="1">
+      <a:defRPr sz="1200" kern="1200">
+        <a:solidFill>
+          <a:schemeClr val="tx1"/>
+        </a:solidFill>
+        <a:latin typeface="+mn-lt"/>
+        <a:ea typeface="+mn-ea"/>
+        <a:cs typeface="+mn-cs"/>
+      </a:defRPr>
+    </a:lvl8pPr>
+    <a:lvl9pPr marL="3657600" algn="l" defTabSz="914400" rtl="0" eaLnBrk="1" latinLnBrk="0" hangingPunct="1">
+      <a:defRPr sz="1200" kern="1200">
+        <a:solidFill>
+          <a:schemeClr val="tx1"/>
+        </a:solidFill>
+        <a:latin typeface="+mn-lt"/>
+        <a:ea typeface="+mn-ea"/>
+        <a:cs typeface="+mn-cs"/>
+      </a:defRPr>
+    </a:lvl9pPr>
+  </p:notesStyle>
+</p:notesMaster>
+</file>
+
+<file path=ppt/notesSlides/notesSlide1.xml><?xml version="1.0" encoding="utf-8"?>
+<p:notes xmlns:a="http://schemas.openxmlformats.org/drawingml/2006/main" xmlns:r="http://schemas.openxmlformats.org/officeDocument/2006/relationships" xmlns:p="http://schemas.openxmlformats.org/presentationml/2006/main">
+  <p:cSld>
+    <p:spTree>
+      <p:nvGrpSpPr>
+        <p:cNvPr id="1" name=""/>
+        <p:cNvGrpSpPr/>
+        <p:nvPr/>
+      </p:nvGrpSpPr>
+      <p:grpSpPr>
+        <a:xfrm>
+          <a:off x="0" y="0"/>
+          <a:ext cx="0" cy="0"/>
+          <a:chOff x="0" y="0"/>
+          <a:chExt cx="0" cy="0"/>
+        </a:xfrm>
+      </p:grpSpPr>
+      <p:sp>
+        <p:nvSpPr>
+          <p:cNvPr id="2" name="Slide Image Placeholder 1"/>
+          <p:cNvSpPr>
+            <a:spLocks noGrp="1" noRot="1" noChangeAspect="1"/>
+          </p:cNvSpPr>
+          <p:nvPr>
+            <p:ph type="sldImg"/>
+          </p:nvPr>
+        </p:nvSpPr>
+        <p:spPr/>
+      </p:sp>
+      <p:sp>
+        <p:nvSpPr>
+          <p:cNvPr id="3" name="Notes Placeholder 2"/>
+          <p:cNvSpPr>
+            <a:spLocks noGrp="1"/>
+          </p:cNvSpPr>
+          <p:nvPr>
+            <p:ph type="body" idx="1"/>
+          </p:nvPr>
+        </p:nvSpPr>
+        <p:spPr/>
+        <p:txBody>
+          <a:bodyPr/>
+          <a:lstStyle/>
+          <a:p>
+            <a:endParaRPr lang="en-GB" dirty="0"/>
+          </a:p>
+        </p:txBody>
+      </p:sp>
+      <p:sp>
+        <p:nvSpPr>
+          <p:cNvPr id="4" name="Slide Number Placeholder 3"/>
+          <p:cNvSpPr>
+            <a:spLocks noGrp="1"/>
+          </p:cNvSpPr>
+          <p:nvPr>
+            <p:ph type="sldNum" sz="quarter" idx="5"/>
+          </p:nvPr>
+        </p:nvSpPr>
+        <p:spPr/>
+        <p:txBody>
+          <a:bodyPr/>
+          <a:lstStyle/>
+          <a:p>
+            <a:fld id="{A78CEBD5-A753-4615-873F-38024EBDB2D8}" type="slidenum">
+              <a:rPr lang="en-GB" smtClean="0"/>
+              <a:t>2</a:t>
+            </a:fld>
+            <a:endParaRPr lang="en-GB"/>
+          </a:p>
+        </p:txBody>
+      </p:sp>
+    </p:spTree>
+    <p:extLst>
+      <p:ext uri="{BB962C8B-B14F-4D97-AF65-F5344CB8AC3E}">
+        <p14:creationId xmlns:p14="http://schemas.microsoft.com/office/powerpoint/2010/main" val="3245196933"/>
+      </p:ext>
+    </p:extLst>
+  </p:cSld>
+  <p:clrMapOvr>
+    <a:masterClrMapping/>
+  </p:clrMapOvr>
+</p:notes>
+</file>
+
+<file path=ppt/notesSlides/notesSlide2.xml><?xml version="1.0" encoding="utf-8"?>
+<p:notes xmlns:a="http://schemas.openxmlformats.org/drawingml/2006/main" xmlns:r="http://schemas.openxmlformats.org/officeDocument/2006/relationships" xmlns:p="http://schemas.openxmlformats.org/presentationml/2006/main">
+  <p:cSld>
+    <p:spTree>
+      <p:nvGrpSpPr>
+        <p:cNvPr id="1" name="">
+          <a:extLst>
+            <a:ext uri="{FF2B5EF4-FFF2-40B4-BE49-F238E27FC236}">
+              <a16:creationId xmlns:a16="http://schemas.microsoft.com/office/drawing/2014/main" id="{13E45675-8F2D-8C3A-BD0B-ECD0B4C5E849}"/>
+            </a:ext>
+          </a:extLst>
+        </p:cNvPr>
+        <p:cNvGrpSpPr/>
+        <p:nvPr/>
+      </p:nvGrpSpPr>
+      <p:grpSpPr>
+        <a:xfrm>
+          <a:off x="0" y="0"/>
+          <a:ext cx="0" cy="0"/>
+          <a:chOff x="0" y="0"/>
+          <a:chExt cx="0" cy="0"/>
+        </a:xfrm>
+      </p:grpSpPr>
+      <p:sp>
+        <p:nvSpPr>
+          <p:cNvPr id="2" name="Slide Image Placeholder 1">
+            <a:extLst>
+              <a:ext uri="{FF2B5EF4-FFF2-40B4-BE49-F238E27FC236}">
+                <a16:creationId xmlns:a16="http://schemas.microsoft.com/office/drawing/2014/main" id="{913AF383-9303-1B75-1201-44F974BD59F7}"/>
+              </a:ext>
+            </a:extLst>
+          </p:cNvPr>
+          <p:cNvSpPr>
+            <a:spLocks noGrp="1" noRot="1" noChangeAspect="1"/>
+          </p:cNvSpPr>
+          <p:nvPr>
+            <p:ph type="sldImg"/>
+          </p:nvPr>
+        </p:nvSpPr>
+        <p:spPr/>
+      </p:sp>
+      <p:sp>
+        <p:nvSpPr>
+          <p:cNvPr id="3" name="Notes Placeholder 2">
+            <a:extLst>
+              <a:ext uri="{FF2B5EF4-FFF2-40B4-BE49-F238E27FC236}">
+                <a16:creationId xmlns:a16="http://schemas.microsoft.com/office/drawing/2014/main" id="{DFEC19FA-F9FE-C209-898D-35B68D673634}"/>
+              </a:ext>
+            </a:extLst>
+          </p:cNvPr>
+          <p:cNvSpPr>
+            <a:spLocks noGrp="1"/>
+          </p:cNvSpPr>
+          <p:nvPr>
+            <p:ph type="body" idx="1"/>
+          </p:nvPr>
+        </p:nvSpPr>
+        <p:spPr/>
+        <p:txBody>
+          <a:bodyPr/>
+          <a:lstStyle/>
+          <a:p>
+            <a:endParaRPr lang="en-GB" dirty="0"/>
+          </a:p>
+        </p:txBody>
+      </p:sp>
+      <p:sp>
+        <p:nvSpPr>
+          <p:cNvPr id="4" name="Slide Number Placeholder 3">
+            <a:extLst>
+              <a:ext uri="{FF2B5EF4-FFF2-40B4-BE49-F238E27FC236}">
+                <a16:creationId xmlns:a16="http://schemas.microsoft.com/office/drawing/2014/main" id="{A6971CF3-F6DA-7C40-97F0-4AB67F8759FC}"/>
+              </a:ext>
+            </a:extLst>
+          </p:cNvPr>
+          <p:cNvSpPr>
+            <a:spLocks noGrp="1"/>
+          </p:cNvSpPr>
+          <p:nvPr>
+            <p:ph type="sldNum" sz="quarter" idx="5"/>
+          </p:nvPr>
+        </p:nvSpPr>
+        <p:spPr/>
+        <p:txBody>
+          <a:bodyPr/>
+          <a:lstStyle/>
+          <a:p>
+            <a:fld id="{A78CEBD5-A753-4615-873F-38024EBDB2D8}" type="slidenum">
+              <a:rPr lang="en-GB" smtClean="0"/>
+              <a:t>3</a:t>
+            </a:fld>
+            <a:endParaRPr lang="en-GB"/>
+          </a:p>
+        </p:txBody>
+      </p:sp>
+    </p:spTree>
+    <p:extLst>
+      <p:ext uri="{BB962C8B-B14F-4D97-AF65-F5344CB8AC3E}">
+        <p14:creationId xmlns:p14="http://schemas.microsoft.com/office/powerpoint/2010/main" val="3480396127"/>
+      </p:ext>
+    </p:extLst>
+  </p:cSld>
+  <p:clrMapOvr>
+    <a:masterClrMapping/>
+  </p:clrMapOvr>
+</p:notes>
+</file>
+
+<file path=ppt/notesSlides/notesSlide3.xml><?xml version="1.0" encoding="utf-8"?>
+<p:notes xmlns:a="http://schemas.openxmlformats.org/drawingml/2006/main" xmlns:r="http://schemas.openxmlformats.org/officeDocument/2006/relationships" xmlns:p="http://schemas.openxmlformats.org/presentationml/2006/main">
+  <p:cSld>
+    <p:spTree>
+      <p:nvGrpSpPr>
+        <p:cNvPr id="1" name="">
+          <a:extLst>
+            <a:ext uri="{FF2B5EF4-FFF2-40B4-BE49-F238E27FC236}">
+              <a16:creationId xmlns:a16="http://schemas.microsoft.com/office/drawing/2014/main" id="{2135D741-F6E8-5D6E-F262-05B7D714B063}"/>
+            </a:ext>
+          </a:extLst>
+        </p:cNvPr>
+        <p:cNvGrpSpPr/>
+        <p:nvPr/>
+      </p:nvGrpSpPr>
+      <p:grpSpPr>
+        <a:xfrm>
+          <a:off x="0" y="0"/>
+          <a:ext cx="0" cy="0"/>
+          <a:chOff x="0" y="0"/>
+          <a:chExt cx="0" cy="0"/>
+        </a:xfrm>
+      </p:grpSpPr>
+      <p:sp>
+        <p:nvSpPr>
+          <p:cNvPr id="2" name="Slide Image Placeholder 1">
+            <a:extLst>
+              <a:ext uri="{FF2B5EF4-FFF2-40B4-BE49-F238E27FC236}">
+                <a16:creationId xmlns:a16="http://schemas.microsoft.com/office/drawing/2014/main" id="{4DBB3226-3535-FD58-05D3-344F9B420CBB}"/>
+              </a:ext>
+            </a:extLst>
+          </p:cNvPr>
+          <p:cNvSpPr>
+            <a:spLocks noGrp="1" noRot="1" noChangeAspect="1"/>
+          </p:cNvSpPr>
+          <p:nvPr>
+            <p:ph type="sldImg"/>
+          </p:nvPr>
+        </p:nvSpPr>
+        <p:spPr/>
+      </p:sp>
+      <p:sp>
+        <p:nvSpPr>
+          <p:cNvPr id="3" name="Notes Placeholder 2">
+            <a:extLst>
+              <a:ext uri="{FF2B5EF4-FFF2-40B4-BE49-F238E27FC236}">
+                <a16:creationId xmlns:a16="http://schemas.microsoft.com/office/drawing/2014/main" id="{5C657311-6B37-8FF4-DFA9-5E761D1D232A}"/>
+              </a:ext>
+            </a:extLst>
+          </p:cNvPr>
+          <p:cNvSpPr>
+            <a:spLocks noGrp="1"/>
+          </p:cNvSpPr>
+          <p:nvPr>
+            <p:ph type="body" idx="1"/>
+          </p:nvPr>
+        </p:nvSpPr>
+        <p:spPr/>
+        <p:txBody>
+          <a:bodyPr/>
+          <a:lstStyle/>
+          <a:p>
+            <a:endParaRPr lang="en-GB" dirty="0"/>
+          </a:p>
+        </p:txBody>
+      </p:sp>
+      <p:sp>
+        <p:nvSpPr>
+          <p:cNvPr id="4" name="Slide Number Placeholder 3">
+            <a:extLst>
+              <a:ext uri="{FF2B5EF4-FFF2-40B4-BE49-F238E27FC236}">
+                <a16:creationId xmlns:a16="http://schemas.microsoft.com/office/drawing/2014/main" id="{E7F93FBA-29A8-ACF8-B7DF-535DFECC78B0}"/>
+              </a:ext>
+            </a:extLst>
+          </p:cNvPr>
+          <p:cNvSpPr>
+            <a:spLocks noGrp="1"/>
+          </p:cNvSpPr>
+          <p:nvPr>
+            <p:ph type="sldNum" sz="quarter" idx="5"/>
+          </p:nvPr>
+        </p:nvSpPr>
+        <p:spPr/>
+        <p:txBody>
+          <a:bodyPr/>
+          <a:lstStyle/>
+          <a:p>
+            <a:fld id="{A78CEBD5-A753-4615-873F-38024EBDB2D8}" type="slidenum">
+              <a:rPr lang="en-GB" smtClean="0"/>
+              <a:t>4</a:t>
+            </a:fld>
+            <a:endParaRPr lang="en-GB"/>
+          </a:p>
+        </p:txBody>
+      </p:sp>
+    </p:spTree>
+    <p:extLst>
+      <p:ext uri="{BB962C8B-B14F-4D97-AF65-F5344CB8AC3E}">
+        <p14:creationId xmlns:p14="http://schemas.microsoft.com/office/powerpoint/2010/main" val="2851301290"/>
+      </p:ext>
+    </p:extLst>
+  </p:cSld>
+  <p:clrMapOvr>
+    <a:masterClrMapping/>
+  </p:clrMapOvr>
+</p:notes>
 </file>
 
 <file path=ppt/slideLayouts/slideLayout1.xml><?xml version="1.0" encoding="utf-8"?>
@@ -259,7 +916,7 @@
           <a:p>
             <a:fld id="{1D8BD707-D9CF-40AE-B4C6-C98DA3205C09}" type="datetimeFigureOut">
               <a:rPr lang="en-US"/>
-              <a:t>2/25/2026</a:t>
+              <a:t>2/27/2026</a:t>
             </a:fld>
             <a:endParaRPr lang="en-US"/>
           </a:p>
@@ -291,7 +948,7 @@
           </a:lstStyle>
           <a:p>
             <a:fld id="{B6F15528-21DE-4FAA-801E-634DDDAF4B2B}" type="slidenum">
-              <a:t>‹N›</a:t>
+              <a:t>‹#›</a:t>
             </a:fld>
             <a:endParaRPr/>
           </a:p>
@@ -444,7 +1101,7 @@
           <a:p>
             <a:fld id="{1D8BD707-D9CF-40AE-B4C6-C98DA3205C09}" type="datetimeFigureOut">
               <a:rPr lang="en-US"/>
-              <a:t>2/25/2026</a:t>
+              <a:t>2/27/2026</a:t>
             </a:fld>
             <a:endParaRPr lang="en-US"/>
           </a:p>
@@ -476,7 +1133,7 @@
           </a:lstStyle>
           <a:p>
             <a:fld id="{B6F15528-21DE-4FAA-801E-634DDDAF4B2B}" type="slidenum">
-              <a:t>‹N›</a:t>
+              <a:t>‹#›</a:t>
             </a:fld>
             <a:endParaRPr/>
           </a:p>
@@ -668,7 +1325,7 @@
           <a:p>
             <a:fld id="{1D8BD707-D9CF-40AE-B4C6-C98DA3205C09}" type="datetimeFigureOut">
               <a:rPr lang="en-US"/>
-              <a:t>2/25/2026</a:t>
+              <a:t>2/27/2026</a:t>
             </a:fld>
             <a:endParaRPr lang="en-US"/>
           </a:p>
@@ -700,7 +1357,7 @@
           </a:lstStyle>
           <a:p>
             <a:fld id="{B6F15528-21DE-4FAA-801E-634DDDAF4B2B}" type="slidenum">
-              <a:t>‹N›</a:t>
+              <a:t>‹#›</a:t>
             </a:fld>
             <a:endParaRPr/>
           </a:p>
@@ -906,7 +1563,7 @@
           <a:p>
             <a:fld id="{1D8BD707-D9CF-40AE-B4C6-C98DA3205C09}" type="datetimeFigureOut">
               <a:rPr lang="en-US"/>
-              <a:t>2/25/2026</a:t>
+              <a:t>2/27/2026</a:t>
             </a:fld>
             <a:endParaRPr lang="en-US"/>
           </a:p>
@@ -938,7 +1595,7 @@
           </a:lstStyle>
           <a:p>
             <a:fld id="{B6F15528-21DE-4FAA-801E-634DDDAF4B2B}" type="slidenum">
-              <a:t>‹N›</a:t>
+              <a:t>‹#›</a:t>
             </a:fld>
             <a:endParaRPr/>
           </a:p>
@@ -1030,7 +1687,7 @@
           <a:p>
             <a:fld id="{1D8BD707-D9CF-40AE-B4C6-C98DA3205C09}" type="datetimeFigureOut">
               <a:rPr lang="en-US"/>
-              <a:t>2/25/2026</a:t>
+              <a:t>2/27/2026</a:t>
             </a:fld>
             <a:endParaRPr lang="en-US"/>
           </a:p>
@@ -1062,7 +1719,7 @@
           </a:lstStyle>
           <a:p>
             <a:fld id="{B6F15528-21DE-4FAA-801E-634DDDAF4B2B}" type="slidenum">
-              <a:t>‹N›</a:t>
+              <a:t>‹#›</a:t>
             </a:fld>
             <a:endParaRPr/>
           </a:p>
@@ -1280,7 +1937,7 @@
           <a:p>
             <a:fld id="{1D8BD707-D9CF-40AE-B4C6-C98DA3205C09}" type="datetimeFigureOut">
               <a:rPr lang="en-US"/>
-              <a:t>2/25/2026</a:t>
+              <a:t>2/27/2026</a:t>
             </a:fld>
             <a:endParaRPr lang="en-US"/>
           </a:p>
@@ -1322,7 +1979,7 @@
           </a:lstStyle>
           <a:p>
             <a:fld id="{B6F15528-21DE-4FAA-801E-634DDDAF4B2B}" type="slidenum">
-              <a:t>‹N›</a:t>
+              <a:t>‹#›</a:t>
             </a:fld>
             <a:endParaRPr/>
           </a:p>
@@ -1553,7 +2210,7 @@
             <a:pPr defTabSz="1219170"/>
             <a:endParaRPr sz="2400" kern="0">
               <a:solidFill>
-                <a:sysClr val="windowText" lastClr="000000"/>
+                <a:srgbClr val="001733"/>
               </a:solidFill>
             </a:endParaRPr>
           </a:p>
@@ -1687,7 +2344,7 @@
         <p:spPr>
           <a:xfrm>
             <a:off x="714933" y="792847"/>
-            <a:ext cx="9924627" cy="538609"/>
+            <a:ext cx="10867467" cy="538609"/>
           </a:xfrm>
         </p:spPr>
         <p:txBody>
@@ -1695,8 +2352,11 @@
           <a:lstStyle/>
           <a:p>
             <a:r>
-              <a:rPr lang="it-IT" sz="3500" dirty="0"/>
-              <a:t>Gruppo di lavoro e oggetto del lavoro</a:t>
+              <a:rPr lang="it-IT" sz="3500" b="1" dirty="0">
+                <a:latin typeface="Helvetica" panose="020B0604020202020204" pitchFamily="34" charset="0"/>
+                <a:cs typeface="Helvetica" panose="020B0604020202020204" pitchFamily="34" charset="0"/>
+              </a:rPr>
+              <a:t>Gruppo e oggetto del lavoro</a:t>
             </a:r>
           </a:p>
         </p:txBody>
@@ -1719,111 +2379,159 @@
         </p:nvSpPr>
         <p:spPr>
           <a:xfrm>
-            <a:off x="609600" y="1694186"/>
-            <a:ext cx="3779906" cy="3976581"/>
+            <a:off x="714933" y="1688664"/>
+            <a:ext cx="3779906" cy="3231654"/>
           </a:xfrm>
         </p:spPr>
         <p:txBody>
           <a:bodyPr/>
           <a:lstStyle/>
           <a:p>
-            <a:pPr algn="ctr"/>
-            <a:r>
-              <a:rPr lang="it-IT" sz="2200" dirty="0">
-                <a:solidFill>
-                  <a:srgbClr val="3639EB"/>
-                </a:solidFill>
-                <a:latin typeface="Arial Black"/>
+            <a:pPr algn="l">
+              <a:lnSpc>
+                <a:spcPct val="150000"/>
+              </a:lnSpc>
+            </a:pPr>
+            <a:r>
+              <a:rPr lang="it-IT" sz="2400" dirty="0">
+                <a:solidFill>
+                  <a:srgbClr val="014FEF"/>
+                </a:solidFill>
+                <a:latin typeface="Helvetica" panose="020B0604020202020204" pitchFamily="34" charset="0"/>
                 <a:ea typeface="+mj-ea"/>
+                <a:cs typeface="Helvetica" panose="020B0604020202020204" pitchFamily="34" charset="0"/>
               </a:rPr>
               <a:t>Componenti</a:t>
             </a:r>
-          </a:p>
-          <a:p>
-            <a:pPr algn="ctr"/>
-            <a:endParaRPr lang="it-IT" sz="2200" dirty="0">
+            <a:endParaRPr lang="it-IT" sz="2400" dirty="0">
               <a:solidFill>
                 <a:srgbClr val="3639EB"/>
               </a:solidFill>
-              <a:latin typeface="Arial Black"/>
+              <a:latin typeface="Helvetica" panose="020B0604020202020204" pitchFamily="34" charset="0"/>
               <a:ea typeface="+mj-ea"/>
+              <a:cs typeface="Helvetica" panose="020B0604020202020204" pitchFamily="34" charset="0"/>
             </a:endParaRPr>
           </a:p>
           <a:p>
-            <a:pPr marL="342900" indent="-342900">
+            <a:pPr marL="342900" indent="-342900" algn="l">
+              <a:lnSpc>
+                <a:spcPct val="150000"/>
+              </a:lnSpc>
               <a:buFont typeface="Arial" panose="020B0604020202020204" pitchFamily="34" charset="0"/>
               <a:buChar char="•"/>
             </a:pPr>
             <a:r>
-              <a:rPr lang="it-IT" sz="2400" dirty="0"/>
+              <a:rPr lang="it-IT" sz="2000" dirty="0">
+                <a:solidFill>
+                  <a:srgbClr val="001733"/>
+                </a:solidFill>
+                <a:latin typeface="Helvetica" panose="020B0604020202020204" pitchFamily="34" charset="0"/>
+                <a:cs typeface="Helvetica" panose="020B0604020202020204" pitchFamily="34" charset="0"/>
+              </a:rPr>
               <a:t>Rachele Tenerini</a:t>
             </a:r>
           </a:p>
           <a:p>
-            <a:pPr marL="342900" indent="-342900">
+            <a:pPr marL="342900" indent="-342900" algn="l">
+              <a:lnSpc>
+                <a:spcPct val="150000"/>
+              </a:lnSpc>
               <a:buFont typeface="Arial" panose="020B0604020202020204" pitchFamily="34" charset="0"/>
               <a:buChar char="•"/>
             </a:pPr>
-            <a:endParaRPr lang="it-IT" sz="2400" dirty="0"/>
-          </a:p>
-          <a:p>
-            <a:pPr marL="342900" indent="-342900">
+            <a:r>
+              <a:rPr lang="it-IT" sz="2000" dirty="0">
+                <a:solidFill>
+                  <a:srgbClr val="001733"/>
+                </a:solidFill>
+                <a:latin typeface="Helvetica" panose="020B0604020202020204" pitchFamily="34" charset="0"/>
+                <a:cs typeface="Helvetica" panose="020B0604020202020204" pitchFamily="34" charset="0"/>
+              </a:rPr>
+              <a:t>Gabriel Spinelli</a:t>
+            </a:r>
+          </a:p>
+          <a:p>
+            <a:pPr marL="342900" indent="-342900" algn="l">
+              <a:lnSpc>
+                <a:spcPct val="150000"/>
+              </a:lnSpc>
               <a:buFont typeface="Arial" panose="020B0604020202020204" pitchFamily="34" charset="0"/>
               <a:buChar char="•"/>
             </a:pPr>
             <a:r>
-              <a:rPr lang="it-IT" sz="2400" dirty="0"/>
-              <a:t>Gabriel Spinelli</a:t>
-            </a:r>
-          </a:p>
-          <a:p>
-            <a:pPr marL="342900" indent="-342900">
+              <a:rPr lang="it-IT" sz="2000" dirty="0" err="1">
+                <a:solidFill>
+                  <a:srgbClr val="001733"/>
+                </a:solidFill>
+                <a:latin typeface="Helvetica" panose="020B0604020202020204" pitchFamily="34" charset="0"/>
+                <a:cs typeface="Helvetica" panose="020B0604020202020204" pitchFamily="34" charset="0"/>
+              </a:rPr>
+              <a:t>Malidu</a:t>
+            </a:r>
+            <a:r>
+              <a:rPr lang="it-IT" sz="2000" dirty="0">
+                <a:solidFill>
+                  <a:srgbClr val="001733"/>
+                </a:solidFill>
+                <a:latin typeface="Helvetica" panose="020B0604020202020204" pitchFamily="34" charset="0"/>
+                <a:cs typeface="Helvetica" panose="020B0604020202020204" pitchFamily="34" charset="0"/>
+              </a:rPr>
+              <a:t> </a:t>
+            </a:r>
+            <a:r>
+              <a:rPr lang="it-IT" sz="2000" dirty="0" err="1">
+                <a:solidFill>
+                  <a:srgbClr val="001733"/>
+                </a:solidFill>
+                <a:latin typeface="Helvetica" panose="020B0604020202020204" pitchFamily="34" charset="0"/>
+                <a:cs typeface="Helvetica" panose="020B0604020202020204" pitchFamily="34" charset="0"/>
+              </a:rPr>
+              <a:t>Udara</a:t>
+            </a:r>
+            <a:r>
+              <a:rPr lang="it-IT" sz="2000" dirty="0">
+                <a:solidFill>
+                  <a:srgbClr val="001733"/>
+                </a:solidFill>
+                <a:latin typeface="Helvetica" panose="020B0604020202020204" pitchFamily="34" charset="0"/>
+                <a:cs typeface="Helvetica" panose="020B0604020202020204" pitchFamily="34" charset="0"/>
+              </a:rPr>
+              <a:t> </a:t>
+            </a:r>
+            <a:r>
+              <a:rPr lang="it-IT" sz="2000" dirty="0" err="1">
+                <a:solidFill>
+                  <a:srgbClr val="001733"/>
+                </a:solidFill>
+                <a:latin typeface="Helvetica" panose="020B0604020202020204" pitchFamily="34" charset="0"/>
+                <a:cs typeface="Helvetica" panose="020B0604020202020204" pitchFamily="34" charset="0"/>
+              </a:rPr>
+              <a:t>Totagamuge</a:t>
+            </a:r>
+            <a:endParaRPr lang="it-IT" sz="2000" dirty="0">
+              <a:solidFill>
+                <a:srgbClr val="001733"/>
+              </a:solidFill>
+              <a:latin typeface="Helvetica" panose="020B0604020202020204" pitchFamily="34" charset="0"/>
+              <a:cs typeface="Helvetica" panose="020B0604020202020204" pitchFamily="34" charset="0"/>
+            </a:endParaRPr>
+          </a:p>
+          <a:p>
+            <a:pPr marL="342900" indent="-342900" algn="l">
+              <a:lnSpc>
+                <a:spcPct val="150000"/>
+              </a:lnSpc>
               <a:buFont typeface="Arial" panose="020B0604020202020204" pitchFamily="34" charset="0"/>
               <a:buChar char="•"/>
             </a:pPr>
-            <a:endParaRPr lang="it-IT" sz="2400" dirty="0"/>
-          </a:p>
-          <a:p>
-            <a:pPr marL="342900" indent="-342900">
-              <a:buFont typeface="Arial" panose="020B0604020202020204" pitchFamily="34" charset="0"/>
-              <a:buChar char="•"/>
-            </a:pPr>
-            <a:r>
-              <a:rPr lang="it-IT" sz="2400" dirty="0" err="1"/>
-              <a:t>Malidu</a:t>
-            </a:r>
-            <a:r>
-              <a:rPr lang="it-IT" sz="2400" dirty="0"/>
-              <a:t> </a:t>
-            </a:r>
-            <a:r>
-              <a:rPr lang="it-IT" sz="2400" dirty="0" err="1"/>
-              <a:t>Udara</a:t>
-            </a:r>
-            <a:r>
-              <a:rPr lang="it-IT" sz="2400" dirty="0"/>
-              <a:t> </a:t>
-            </a:r>
-            <a:r>
-              <a:rPr lang="it-IT" sz="2400" dirty="0" err="1"/>
-              <a:t>Totagamuge</a:t>
-            </a:r>
-            <a:endParaRPr lang="it-IT" sz="2400" dirty="0"/>
-          </a:p>
-          <a:p>
-            <a:pPr marL="342900" indent="-342900">
-              <a:buFont typeface="Arial" panose="020B0604020202020204" pitchFamily="34" charset="0"/>
-              <a:buChar char="•"/>
-            </a:pPr>
-            <a:endParaRPr lang="it-IT" sz="2400" dirty="0"/>
-          </a:p>
-          <a:p>
-            <a:pPr marL="342900" indent="-342900">
-              <a:buFont typeface="Arial" panose="020B0604020202020204" pitchFamily="34" charset="0"/>
-              <a:buChar char="•"/>
-            </a:pPr>
-            <a:r>
-              <a:rPr lang="it-IT" sz="2400" dirty="0"/>
+            <a:r>
+              <a:rPr lang="it-IT" sz="2000" dirty="0">
+                <a:solidFill>
+                  <a:srgbClr val="001733"/>
+                </a:solidFill>
+                <a:latin typeface="Helvetica" panose="020B0604020202020204" pitchFamily="34" charset="0"/>
+                <a:cs typeface="Helvetica" panose="020B0604020202020204" pitchFamily="34" charset="0"/>
+              </a:rPr>
               <a:t>Marco Zanola</a:t>
             </a:r>
           </a:p>
@@ -1834,7 +2542,11 @@
             <a:endParaRPr lang="it-IT" dirty="0"/>
           </a:p>
           <a:p>
-            <a:endParaRPr lang="it-IT" dirty="0"/>
+            <a:endParaRPr lang="it-IT" dirty="0">
+              <a:solidFill>
+                <a:srgbClr val="FFFFFF"/>
+              </a:solidFill>
+            </a:endParaRPr>
           </a:p>
         </p:txBody>
       </p:sp>
@@ -1856,24 +2568,179 @@
         </p:nvSpPr>
         <p:spPr>
           <a:xfrm>
-            <a:off x="4658061" y="1694187"/>
-            <a:ext cx="6924339" cy="4739759"/>
+            <a:off x="4494838" y="1688664"/>
+            <a:ext cx="7087561" cy="6278642"/>
           </a:xfrm>
         </p:spPr>
         <p:txBody>
           <a:bodyPr/>
           <a:lstStyle/>
           <a:p>
-            <a:r>
-              <a:rPr lang="en-US" sz="2200" dirty="0">
-                <a:solidFill>
-                  <a:srgbClr val="3639EB"/>
-                </a:solidFill>
-                <a:latin typeface="Arial Black"/>
+            <a:pPr>
+              <a:lnSpc>
+                <a:spcPct val="150000"/>
+              </a:lnSpc>
+            </a:pPr>
+            <a:r>
+              <a:rPr lang="en-US" sz="2400" dirty="0" err="1">
+                <a:solidFill>
+                  <a:srgbClr val="014FEF"/>
+                </a:solidFill>
+                <a:latin typeface="Helvetica" panose="020B0604020202020204" pitchFamily="34" charset="0"/>
                 <a:ea typeface="+mj-ea"/>
-              </a:rPr>
-              <a:t>Track 2: freelance open track</a:t>
-            </a:r>
+                <a:cs typeface="Helvetica" panose="020B0604020202020204" pitchFamily="34" charset="0"/>
+              </a:rPr>
+              <a:t>Oggetto</a:t>
+            </a:r>
+            <a:r>
+              <a:rPr lang="en-US" sz="2400" dirty="0">
+                <a:solidFill>
+                  <a:srgbClr val="014FEF"/>
+                </a:solidFill>
+                <a:latin typeface="Helvetica" panose="020B0604020202020204" pitchFamily="34" charset="0"/>
+                <a:ea typeface="+mj-ea"/>
+                <a:cs typeface="Helvetica" panose="020B0604020202020204" pitchFamily="34" charset="0"/>
+              </a:rPr>
+              <a:t> del </a:t>
+            </a:r>
+            <a:r>
+              <a:rPr lang="en-US" sz="2400" dirty="0" err="1">
+                <a:solidFill>
+                  <a:srgbClr val="014FEF"/>
+                </a:solidFill>
+                <a:latin typeface="Helvetica" panose="020B0604020202020204" pitchFamily="34" charset="0"/>
+                <a:ea typeface="+mj-ea"/>
+                <a:cs typeface="Helvetica" panose="020B0604020202020204" pitchFamily="34" charset="0"/>
+              </a:rPr>
+              <a:t>lavoro</a:t>
+            </a:r>
+            <a:r>
+              <a:rPr lang="en-US" sz="2400" dirty="0">
+                <a:solidFill>
+                  <a:srgbClr val="014FEF"/>
+                </a:solidFill>
+                <a:latin typeface="Helvetica" panose="020B0604020202020204" pitchFamily="34" charset="0"/>
+                <a:ea typeface="+mj-ea"/>
+                <a:cs typeface="Helvetica" panose="020B0604020202020204" pitchFamily="34" charset="0"/>
+              </a:rPr>
+              <a:t>:</a:t>
+            </a:r>
+          </a:p>
+          <a:p>
+            <a:pPr>
+              <a:lnSpc>
+                <a:spcPct val="150000"/>
+              </a:lnSpc>
+            </a:pPr>
+            <a:r>
+              <a:rPr lang="en-US" sz="2000" dirty="0">
+                <a:solidFill>
+                  <a:srgbClr val="001733"/>
+                </a:solidFill>
+                <a:latin typeface="Helvetica" panose="020B0604020202020204" pitchFamily="34" charset="0"/>
+                <a:ea typeface="+mj-ea"/>
+                <a:cs typeface="Helvetica" panose="020B0604020202020204" pitchFamily="34" charset="0"/>
+              </a:rPr>
+              <a:t>Track 2 freelance open track:</a:t>
+            </a:r>
+          </a:p>
+          <a:p>
+            <a:pPr fontAlgn="base"/>
+            <a:r>
+              <a:rPr lang="it-IT" sz="2000" b="1" dirty="0" err="1">
+                <a:solidFill>
+                  <a:srgbClr val="001733"/>
+                </a:solidFill>
+                <a:latin typeface="Helvetica" panose="020B0604020202020204" pitchFamily="34" charset="0"/>
+                <a:cs typeface="Helvetica" panose="020B0604020202020204" pitchFamily="34" charset="0"/>
+              </a:rPr>
+              <a:t>Brazilian</a:t>
+            </a:r>
+            <a:r>
+              <a:rPr lang="it-IT" sz="2000" b="1" dirty="0">
+                <a:solidFill>
+                  <a:srgbClr val="001733"/>
+                </a:solidFill>
+                <a:latin typeface="Helvetica" panose="020B0604020202020204" pitchFamily="34" charset="0"/>
+                <a:cs typeface="Helvetica" panose="020B0604020202020204" pitchFamily="34" charset="0"/>
+              </a:rPr>
+              <a:t> E-Commerce Public Dataset by </a:t>
+            </a:r>
+            <a:r>
+              <a:rPr lang="it-IT" sz="2000" b="1" dirty="0" err="1">
+                <a:solidFill>
+                  <a:srgbClr val="001733"/>
+                </a:solidFill>
+                <a:latin typeface="Helvetica" panose="020B0604020202020204" pitchFamily="34" charset="0"/>
+                <a:cs typeface="Helvetica" panose="020B0604020202020204" pitchFamily="34" charset="0"/>
+              </a:rPr>
+              <a:t>Olist</a:t>
+            </a:r>
+            <a:br>
+              <a:rPr lang="it-IT" sz="2000" b="1" dirty="0">
+                <a:solidFill>
+                  <a:srgbClr val="001733"/>
+                </a:solidFill>
+                <a:latin typeface="Helvetica" panose="020B0604020202020204" pitchFamily="34" charset="0"/>
+                <a:cs typeface="Helvetica" panose="020B0604020202020204" pitchFamily="34" charset="0"/>
+              </a:rPr>
+            </a:br>
+            <a:endParaRPr lang="it-IT" sz="2000" dirty="0">
+              <a:solidFill>
+                <a:srgbClr val="001733"/>
+              </a:solidFill>
+              <a:latin typeface="Helvetica" panose="020B0604020202020204" pitchFamily="34" charset="0"/>
+              <a:cs typeface="Helvetica" panose="020B0604020202020204" pitchFamily="34" charset="0"/>
+            </a:endParaRPr>
+          </a:p>
+          <a:p>
+            <a:pPr fontAlgn="base"/>
+            <a:r>
+              <a:rPr lang="it-IT" sz="2000" dirty="0">
+                <a:solidFill>
+                  <a:srgbClr val="001733"/>
+                </a:solidFill>
+                <a:latin typeface="Helvetica" panose="020B0604020202020204" pitchFamily="34" charset="0"/>
+                <a:cs typeface="Helvetica" panose="020B0604020202020204" pitchFamily="34" charset="0"/>
+              </a:rPr>
+              <a:t>Source: </a:t>
+            </a:r>
+            <a:r>
+              <a:rPr lang="it-IT" sz="2000" dirty="0">
+                <a:solidFill>
+                  <a:srgbClr val="001733"/>
+                </a:solidFill>
+                <a:latin typeface="Helvetica" panose="020B0604020202020204" pitchFamily="34" charset="0"/>
+                <a:cs typeface="Helvetica" panose="020B0604020202020204" pitchFamily="34" charset="0"/>
+                <a:hlinkClick r:id="rId3"/>
+              </a:rPr>
+              <a:t>https://www.kaggle.com/datasets/olistbr/brazilian-ecommerce</a:t>
+            </a:r>
+            <a:endParaRPr lang="it-IT" sz="2000" dirty="0">
+              <a:solidFill>
+                <a:srgbClr val="001733"/>
+              </a:solidFill>
+              <a:latin typeface="Helvetica" panose="020B0604020202020204" pitchFamily="34" charset="0"/>
+              <a:cs typeface="Helvetica" panose="020B0604020202020204" pitchFamily="34" charset="0"/>
+            </a:endParaRPr>
+          </a:p>
+          <a:p>
+            <a:pPr fontAlgn="base"/>
+            <a:endParaRPr lang="it-IT" sz="2000" b="1" dirty="0">
+              <a:solidFill>
+                <a:srgbClr val="001733"/>
+              </a:solidFill>
+              <a:latin typeface="Helvetica" panose="020B0604020202020204" pitchFamily="34" charset="0"/>
+              <a:cs typeface="Helvetica" panose="020B0604020202020204" pitchFamily="34" charset="0"/>
+            </a:endParaRPr>
+          </a:p>
+          <a:p>
+            <a:pPr fontAlgn="base"/>
+            <a:endParaRPr lang="it-IT" sz="2400" b="1" dirty="0">
+              <a:solidFill>
+                <a:srgbClr val="001733"/>
+              </a:solidFill>
+            </a:endParaRPr>
           </a:p>
           <a:p>
             <a:endParaRPr lang="en-US" sz="2200" dirty="0">
@@ -1885,37 +2752,6 @@
             </a:endParaRPr>
           </a:p>
           <a:p>
-            <a:pPr fontAlgn="base"/>
-            <a:r>
-              <a:rPr lang="it-IT" sz="2400" b="1" dirty="0" err="1"/>
-              <a:t>Brazilian</a:t>
-            </a:r>
-            <a:r>
-              <a:rPr lang="it-IT" sz="2400" b="1" dirty="0"/>
-              <a:t> E-Commerce Public Dataset by </a:t>
-            </a:r>
-            <a:r>
-              <a:rPr lang="it-IT" sz="2400" b="1" dirty="0" err="1"/>
-              <a:t>Olist</a:t>
-            </a:r>
-            <a:endParaRPr lang="it-IT" sz="2400" b="1" dirty="0"/>
-          </a:p>
-          <a:p>
-            <a:pPr fontAlgn="base"/>
-            <a:endParaRPr lang="it-IT" sz="2400" b="1" dirty="0"/>
-          </a:p>
-          <a:p>
-            <a:pPr fontAlgn="base"/>
-            <a:r>
-              <a:rPr lang="it-IT" b="1" dirty="0"/>
-              <a:t>https://www.kaggle.com/datasets/olistbr/brazilian-ecommerce</a:t>
-            </a:r>
-          </a:p>
-          <a:p>
-            <a:pPr fontAlgn="base"/>
-            <a:endParaRPr lang="it-IT" sz="2400" b="1" dirty="0"/>
-          </a:p>
-          <a:p>
             <a:endParaRPr lang="en-US" sz="2200" dirty="0">
               <a:solidFill>
                 <a:srgbClr val="3639EB"/>
@@ -1927,16 +2763,7 @@
           <a:p>
             <a:endParaRPr lang="en-US" sz="2200" dirty="0">
               <a:solidFill>
-                <a:srgbClr val="3639EB"/>
-              </a:solidFill>
-              <a:latin typeface="Arial Black"/>
-              <a:ea typeface="+mj-ea"/>
-            </a:endParaRPr>
-          </a:p>
-          <a:p>
-            <a:endParaRPr lang="en-US" sz="2200" dirty="0">
-              <a:solidFill>
-                <a:srgbClr val="3639EB"/>
+                <a:srgbClr val="001733"/>
               </a:solidFill>
               <a:latin typeface="Arial Black"/>
               <a:ea typeface="+mj-ea"/>
@@ -1977,7 +2804,7 @@
           <p:nvPr/>
         </p:nvPicPr>
         <p:blipFill>
-          <a:blip r:embed="rId2">
+          <a:blip r:embed="rId4">
             <a:extLst>
               <a:ext uri="{28A0092B-C50C-407E-A947-70E740481C1C}">
                 <a14:useLocalDpi xmlns:a14="http://schemas.microsoft.com/office/drawing/2010/main" val="0"/>
@@ -1990,8 +2817,8 @@
         </p:blipFill>
         <p:spPr>
           <a:xfrm>
-            <a:off x="9965274" y="3926541"/>
-            <a:ext cx="1348571" cy="1348571"/>
+            <a:off x="10530225" y="4735439"/>
+            <a:ext cx="1052175" cy="1052175"/>
           </a:xfrm>
           <a:prstGeom prst="rect">
             <a:avLst/>
@@ -2019,7 +2846,7 @@
         <p:cNvPr id="1" name="">
           <a:extLst>
             <a:ext uri="{FF2B5EF4-FFF2-40B4-BE49-F238E27FC236}">
-              <a16:creationId xmlns:a16="http://schemas.microsoft.com/office/drawing/2014/main" id="{121FD960-AB26-4325-44D4-B05D6DD401BF}"/>
+              <a16:creationId xmlns:a16="http://schemas.microsoft.com/office/drawing/2014/main" id="{5E05542D-9B82-7324-1F8D-AA77C2230AC0}"/>
             </a:ext>
           </a:extLst>
         </p:cNvPr>
@@ -2039,7 +2866,7 @@
           <p:cNvPr id="3" name="Titolo 2">
             <a:extLst>
               <a:ext uri="{FF2B5EF4-FFF2-40B4-BE49-F238E27FC236}">
-                <a16:creationId xmlns:a16="http://schemas.microsoft.com/office/drawing/2014/main" id="{F399A3E7-A3C6-ABC9-3B11-DED01156B3E8}"/>
+                <a16:creationId xmlns:a16="http://schemas.microsoft.com/office/drawing/2014/main" id="{91765F8B-6E81-C0E4-2D18-DDB1282A7EDE}"/>
               </a:ext>
             </a:extLst>
           </p:cNvPr>
@@ -2050,14 +2877,64 @@
             <p:ph type="title"/>
           </p:nvPr>
         </p:nvSpPr>
-        <p:spPr/>
+        <p:spPr>
+          <a:xfrm>
+            <a:off x="714933" y="792847"/>
+            <a:ext cx="10867467" cy="1107996"/>
+          </a:xfrm>
+        </p:spPr>
         <p:txBody>
           <a:bodyPr/>
           <a:lstStyle/>
           <a:p>
             <a:r>
-              <a:rPr lang="it-IT" dirty="0"/>
-              <a:t>Il problema</a:t>
+              <a:rPr lang="it-IT" sz="3500" b="1" dirty="0">
+                <a:solidFill>
+                  <a:srgbClr val="014FEF"/>
+                </a:solidFill>
+                <a:latin typeface="Helvetica" panose="020B0604020202020204" pitchFamily="34" charset="0"/>
+                <a:cs typeface="Helvetica" panose="020B0604020202020204" pitchFamily="34" charset="0"/>
+              </a:rPr>
+              <a:t>Obiettivo: </a:t>
+            </a:r>
+            <a:br>
+              <a:rPr lang="it-IT" sz="3500" b="1" dirty="0">
+                <a:solidFill>
+                  <a:srgbClr val="014FEF"/>
+                </a:solidFill>
+                <a:latin typeface="Helvetica" panose="020B0604020202020204" pitchFamily="34" charset="0"/>
+                <a:cs typeface="Helvetica" panose="020B0604020202020204" pitchFamily="34" charset="0"/>
+              </a:rPr>
+            </a:br>
+            <a:r>
+              <a:rPr lang="it-IT" sz="3500" b="1" dirty="0">
+                <a:solidFill>
+                  <a:srgbClr val="014FEF"/>
+                </a:solidFill>
+                <a:latin typeface="Helvetica" panose="020B0604020202020204" pitchFamily="34" charset="0"/>
+                <a:cs typeface="Helvetica" panose="020B0604020202020204" pitchFamily="34" charset="0"/>
+              </a:rPr>
+              <a:t>Analisi del Dataset </a:t>
+            </a:r>
+            <a:r>
+              <a:rPr lang="it-IT" sz="3500" b="1" dirty="0" err="1">
+                <a:solidFill>
+                  <a:srgbClr val="014FEF"/>
+                </a:solidFill>
+                <a:latin typeface="Helvetica" panose="020B0604020202020204" pitchFamily="34" charset="0"/>
+                <a:cs typeface="Helvetica" panose="020B0604020202020204" pitchFamily="34" charset="0"/>
+              </a:rPr>
+              <a:t>Brazilian</a:t>
+            </a:r>
+            <a:r>
+              <a:rPr lang="it-IT" sz="3500" b="1" dirty="0">
+                <a:solidFill>
+                  <a:srgbClr val="014FEF"/>
+                </a:solidFill>
+                <a:latin typeface="Helvetica" panose="020B0604020202020204" pitchFamily="34" charset="0"/>
+                <a:cs typeface="Helvetica" panose="020B0604020202020204" pitchFamily="34" charset="0"/>
+              </a:rPr>
+              <a:t> E-Commerce</a:t>
             </a:r>
           </a:p>
         </p:txBody>
@@ -2067,7 +2944,7 @@
           <p:cNvPr id="4" name="Segnaposto contenuto 3">
             <a:extLst>
               <a:ext uri="{FF2B5EF4-FFF2-40B4-BE49-F238E27FC236}">
-                <a16:creationId xmlns:a16="http://schemas.microsoft.com/office/drawing/2014/main" id="{FA0BD8F3-B879-1409-0E06-55ED191ABAC1}"/>
+                <a16:creationId xmlns:a16="http://schemas.microsoft.com/office/drawing/2014/main" id="{6F0E1E5B-FACE-BE4A-AB35-CF2A9D3BA4D7}"/>
               </a:ext>
             </a:extLst>
           </p:cNvPr>
@@ -2080,88 +2957,360 @@
         </p:nvSpPr>
         <p:spPr>
           <a:xfrm>
-            <a:off x="609599" y="1577340"/>
-            <a:ext cx="9233647" cy="3600986"/>
+            <a:off x="714932" y="2183516"/>
+            <a:ext cx="3340701" cy="2814617"/>
           </a:xfrm>
         </p:spPr>
         <p:txBody>
           <a:bodyPr/>
           <a:lstStyle/>
           <a:p>
-            <a:endParaRPr lang="it-IT" dirty="0"/>
-          </a:p>
-          <a:p>
-            <a:endParaRPr lang="it-IT" dirty="0"/>
-          </a:p>
-          <a:p>
-            <a:r>
-              <a:rPr lang="it-IT" dirty="0"/>
-              <a:t>  Collegamento fra i vari </a:t>
-            </a:r>
-            <a:r>
-              <a:rPr lang="it-IT" dirty="0" err="1"/>
-              <a:t>datadset</a:t>
-            </a:r>
-            <a:r>
-              <a:rPr lang="it-IT" dirty="0"/>
-              <a:t> con unione di quelli rilevanti e usufruibili</a:t>
-            </a:r>
-          </a:p>
-          <a:p>
-            <a:endParaRPr lang="it-IT" dirty="0"/>
-          </a:p>
-          <a:p>
-            <a:endParaRPr lang="it-IT" dirty="0"/>
-          </a:p>
-          <a:p>
-            <a:endParaRPr lang="it-IT" dirty="0"/>
-          </a:p>
-          <a:p>
-            <a:endParaRPr lang="it-IT" dirty="0"/>
-          </a:p>
-          <a:p>
-            <a:pPr marL="285750" indent="-285750">
-              <a:buFontTx/>
-              <a:buChar char="-"/>
+            <a:pPr algn="l">
+              <a:lnSpc>
+                <a:spcPct val="150000"/>
+              </a:lnSpc>
             </a:pPr>
             <a:r>
-              <a:rPr lang="it-IT" dirty="0"/>
-              <a:t>Traduzione e conversione dal Portoghese _____Python :Web </a:t>
-            </a:r>
-            <a:r>
-              <a:rPr lang="it-IT" dirty="0" err="1"/>
-              <a:t>scraping</a:t>
-            </a:r>
-            <a:r>
-              <a:rPr lang="it-IT" dirty="0"/>
-              <a:t> e API</a:t>
-            </a:r>
-          </a:p>
-          <a:p>
-            <a:pPr marL="285750" indent="-285750">
-              <a:buFontTx/>
-              <a:buChar char="-"/>
+              <a:rPr lang="it-IT" sz="2400" dirty="0">
+                <a:solidFill>
+                  <a:srgbClr val="014FEF"/>
+                </a:solidFill>
+                <a:latin typeface="Helvetica" panose="020B0604020202020204" pitchFamily="34" charset="0"/>
+                <a:ea typeface="+mj-ea"/>
+                <a:cs typeface="Helvetica" panose="020B0604020202020204" pitchFamily="34" charset="0"/>
+              </a:rPr>
+              <a:t>Contenuto</a:t>
+            </a:r>
+            <a:r>
+              <a:rPr lang="it-IT" sz="2400" b="1" dirty="0">
+                <a:solidFill>
+                  <a:srgbClr val="014FEF"/>
+                </a:solidFill>
+              </a:rPr>
+              <a:t>:</a:t>
+            </a:r>
+            <a:r>
+              <a:rPr lang="it-IT" sz="2400" dirty="0">
+                <a:solidFill>
+                  <a:srgbClr val="014FEF"/>
+                </a:solidFill>
+              </a:rPr>
+              <a:t> </a:t>
+            </a:r>
+          </a:p>
+          <a:p>
+            <a:pPr marL="342900" indent="-342900" algn="l">
+              <a:lnSpc>
+                <a:spcPct val="150000"/>
+              </a:lnSpc>
+              <a:buFont typeface="Arial" panose="020B0604020202020204" pitchFamily="34" charset="0"/>
+              <a:buChar char="•"/>
             </a:pPr>
-            <a:endParaRPr lang="it-IT" dirty="0"/>
-          </a:p>
-          <a:p>
-            <a:endParaRPr lang="it-IT" dirty="0"/>
-          </a:p>
-          <a:p>
-            <a:endParaRPr lang="it-IT" dirty="0"/>
-          </a:p>
-          <a:p>
-            <a:endParaRPr lang="it-IT" dirty="0"/>
-          </a:p>
-          <a:p>
-            <a:endParaRPr lang="it-IT" dirty="0"/>
+            <a:r>
+              <a:rPr lang="it-IT" sz="2000" dirty="0">
+                <a:latin typeface="Helvetica" panose="020B0604020202020204" pitchFamily="34" charset="0"/>
+                <a:cs typeface="Helvetica" panose="020B0604020202020204" pitchFamily="34" charset="0"/>
+              </a:rPr>
+              <a:t>Categorie prodotti</a:t>
+            </a:r>
+          </a:p>
+          <a:p>
+            <a:pPr marL="342900" indent="-342900" algn="l">
+              <a:lnSpc>
+                <a:spcPct val="150000"/>
+              </a:lnSpc>
+              <a:buFont typeface="Arial" panose="020B0604020202020204" pitchFamily="34" charset="0"/>
+              <a:buChar char="•"/>
+            </a:pPr>
+            <a:r>
+              <a:rPr lang="it-IT" sz="2000" dirty="0">
+                <a:latin typeface="Helvetica" panose="020B0604020202020204" pitchFamily="34" charset="0"/>
+                <a:cs typeface="Helvetica" panose="020B0604020202020204" pitchFamily="34" charset="0"/>
+              </a:rPr>
+              <a:t>Venduto </a:t>
+            </a:r>
+          </a:p>
+          <a:p>
+            <a:pPr marL="342900" indent="-342900" algn="l">
+              <a:lnSpc>
+                <a:spcPct val="150000"/>
+              </a:lnSpc>
+              <a:buFont typeface="Arial" panose="020B0604020202020204" pitchFamily="34" charset="0"/>
+              <a:buChar char="•"/>
+            </a:pPr>
+            <a:r>
+              <a:rPr lang="it-IT" sz="2000" dirty="0">
+                <a:latin typeface="Helvetica" panose="020B0604020202020204" pitchFamily="34" charset="0"/>
+                <a:cs typeface="Helvetica" panose="020B0604020202020204" pitchFamily="34" charset="0"/>
+              </a:rPr>
+              <a:t>Spedizioni</a:t>
+            </a:r>
+          </a:p>
+          <a:p>
+            <a:pPr marL="342900" indent="-342900" algn="l">
+              <a:lnSpc>
+                <a:spcPct val="150000"/>
+              </a:lnSpc>
+              <a:buFont typeface="Arial" panose="020B0604020202020204" pitchFamily="34" charset="0"/>
+              <a:buChar char="•"/>
+            </a:pPr>
+            <a:r>
+              <a:rPr lang="it-IT" sz="2000" dirty="0">
+                <a:latin typeface="Helvetica" panose="020B0604020202020204" pitchFamily="34" charset="0"/>
+                <a:cs typeface="Helvetica" panose="020B0604020202020204" pitchFamily="34" charset="0"/>
+              </a:rPr>
+              <a:t>Metodi di pagamento</a:t>
+            </a:r>
+          </a:p>
+          <a:p>
+            <a:pPr marL="342900" indent="-342900" algn="l">
+              <a:lnSpc>
+                <a:spcPct val="150000"/>
+              </a:lnSpc>
+              <a:buFont typeface="Arial" panose="020B0604020202020204" pitchFamily="34" charset="0"/>
+              <a:buChar char="•"/>
+            </a:pPr>
+            <a:r>
+              <a:rPr lang="it-IT" sz="2000" dirty="0">
+                <a:solidFill>
+                  <a:srgbClr val="001733"/>
+                </a:solidFill>
+                <a:latin typeface="Helvetica" panose="020B0604020202020204" pitchFamily="34" charset="0"/>
+                <a:cs typeface="Helvetica" panose="020B0604020202020204" pitchFamily="34" charset="0"/>
+              </a:rPr>
+              <a:t>Recensioni</a:t>
+            </a:r>
+          </a:p>
+        </p:txBody>
+      </p:sp>
+      <p:pic>
+        <p:nvPicPr>
+          <p:cNvPr id="7" name="Immagine 6">
+            <a:extLst>
+              <a:ext uri="{FF2B5EF4-FFF2-40B4-BE49-F238E27FC236}">
+                <a16:creationId xmlns:a16="http://schemas.microsoft.com/office/drawing/2014/main" id="{A88D0979-00FA-EB2B-305D-3DAF7D3C6969}"/>
+              </a:ext>
+            </a:extLst>
+          </p:cNvPr>
+          <p:cNvPicPr>
+            <a:picLocks noChangeAspect="1"/>
+          </p:cNvPicPr>
+          <p:nvPr/>
+        </p:nvPicPr>
+        <p:blipFill>
+          <a:blip r:embed="rId3">
+            <a:extLst>
+              <a:ext uri="{28A0092B-C50C-407E-A947-70E740481C1C}">
+                <a14:useLocalDpi xmlns:a14="http://schemas.microsoft.com/office/drawing/2010/main" val="0"/>
+              </a:ext>
+            </a:extLst>
+          </a:blip>
+          <a:stretch>
+            <a:fillRect/>
+          </a:stretch>
+        </p:blipFill>
+        <p:spPr>
+          <a:xfrm>
+            <a:off x="10530225" y="4735439"/>
+            <a:ext cx="1052175" cy="1052175"/>
+          </a:xfrm>
+          <a:prstGeom prst="rect">
+            <a:avLst/>
+          </a:prstGeom>
+        </p:spPr>
+      </p:pic>
+      <p:sp>
+        <p:nvSpPr>
+          <p:cNvPr id="8" name="Segnaposto contenuto 3">
+            <a:extLst>
+              <a:ext uri="{FF2B5EF4-FFF2-40B4-BE49-F238E27FC236}">
+                <a16:creationId xmlns:a16="http://schemas.microsoft.com/office/drawing/2014/main" id="{1DAB7BBC-0F5E-22FB-C031-CB8C616EDBDC}"/>
+              </a:ext>
+            </a:extLst>
+          </p:cNvPr>
+          <p:cNvSpPr txBox="1">
+            <a:spLocks/>
+          </p:cNvSpPr>
+          <p:nvPr/>
+        </p:nvSpPr>
+        <p:spPr>
+          <a:xfrm>
+            <a:off x="4494903" y="2183516"/>
+            <a:ext cx="6982165" cy="1881990"/>
+          </a:xfrm>
+          <a:prstGeom prst="rect">
+            <a:avLst/>
+          </a:prstGeom>
+        </p:spPr>
+        <p:txBody>
+          <a:bodyPr wrap="square" lIns="0" tIns="0" rIns="0" bIns="0">
+            <a:spAutoFit/>
+          </a:bodyPr>
+          <a:lstStyle>
+            <a:lvl1pPr marL="0">
+              <a:defRPr b="0" i="0">
+                <a:solidFill>
+                  <a:schemeClr val="tx1"/>
+                </a:solidFill>
+                <a:latin typeface="+mn-lt"/>
+                <a:ea typeface="+mn-ea"/>
+                <a:cs typeface="+mn-cs"/>
+              </a:defRPr>
+            </a:lvl1pPr>
+            <a:lvl2pPr marL="609585">
+              <a:defRPr>
+                <a:latin typeface="+mn-lt"/>
+                <a:ea typeface="+mn-ea"/>
+                <a:cs typeface="+mn-cs"/>
+              </a:defRPr>
+            </a:lvl2pPr>
+            <a:lvl3pPr marL="1219170">
+              <a:defRPr>
+                <a:latin typeface="+mn-lt"/>
+                <a:ea typeface="+mn-ea"/>
+                <a:cs typeface="+mn-cs"/>
+              </a:defRPr>
+            </a:lvl3pPr>
+            <a:lvl4pPr marL="1828754">
+              <a:defRPr>
+                <a:latin typeface="+mn-lt"/>
+                <a:ea typeface="+mn-ea"/>
+                <a:cs typeface="+mn-cs"/>
+              </a:defRPr>
+            </a:lvl4pPr>
+            <a:lvl5pPr marL="2438339">
+              <a:defRPr>
+                <a:latin typeface="+mn-lt"/>
+                <a:ea typeface="+mn-ea"/>
+                <a:cs typeface="+mn-cs"/>
+              </a:defRPr>
+            </a:lvl5pPr>
+            <a:lvl6pPr marL="3047924">
+              <a:defRPr>
+                <a:latin typeface="+mn-lt"/>
+                <a:ea typeface="+mn-ea"/>
+                <a:cs typeface="+mn-cs"/>
+              </a:defRPr>
+            </a:lvl6pPr>
+            <a:lvl7pPr marL="3657509">
+              <a:defRPr>
+                <a:latin typeface="+mn-lt"/>
+                <a:ea typeface="+mn-ea"/>
+                <a:cs typeface="+mn-cs"/>
+              </a:defRPr>
+            </a:lvl7pPr>
+            <a:lvl8pPr marL="4267093">
+              <a:defRPr>
+                <a:latin typeface="+mn-lt"/>
+                <a:ea typeface="+mn-ea"/>
+                <a:cs typeface="+mn-cs"/>
+              </a:defRPr>
+            </a:lvl8pPr>
+            <a:lvl9pPr marL="4876678">
+              <a:defRPr>
+                <a:latin typeface="+mn-lt"/>
+                <a:ea typeface="+mn-ea"/>
+                <a:cs typeface="+mn-cs"/>
+              </a:defRPr>
+            </a:lvl9pPr>
+          </a:lstStyle>
+          <a:p>
+            <a:pPr algn="l">
+              <a:lnSpc>
+                <a:spcPct val="150000"/>
+              </a:lnSpc>
+            </a:pPr>
+            <a:r>
+              <a:rPr lang="it-IT" sz="2400" kern="0" dirty="0">
+                <a:solidFill>
+                  <a:srgbClr val="014FEF"/>
+                </a:solidFill>
+                <a:latin typeface="Helvetica" panose="020B0604020202020204" pitchFamily="34" charset="0"/>
+                <a:ea typeface="+mj-ea"/>
+                <a:cs typeface="Helvetica" panose="020B0604020202020204" pitchFamily="34" charset="0"/>
+              </a:rPr>
+              <a:t>Obiettivo dell’analisi:</a:t>
+            </a:r>
+            <a:endParaRPr lang="it-IT" sz="2400" kern="0" dirty="0">
+              <a:solidFill>
+                <a:srgbClr val="014FEF"/>
+              </a:solidFill>
+              <a:latin typeface="Helvetica" panose="020B0604020202020204" pitchFamily="34" charset="0"/>
+              <a:cs typeface="Helvetica" panose="020B0604020202020204" pitchFamily="34" charset="0"/>
+            </a:endParaRPr>
+          </a:p>
+          <a:p>
+            <a:pPr marL="342900" indent="-342900">
+              <a:lnSpc>
+                <a:spcPct val="150000"/>
+              </a:lnSpc>
+              <a:buFont typeface="Arial" panose="020B0604020202020204" pitchFamily="34" charset="0"/>
+              <a:buChar char="•"/>
+            </a:pPr>
+            <a:r>
+              <a:rPr lang="it-IT" sz="2000" dirty="0">
+                <a:latin typeface="Helvetica" panose="020B0604020202020204" pitchFamily="34" charset="0"/>
+                <a:cs typeface="Helvetica" panose="020B0604020202020204" pitchFamily="34" charset="0"/>
+              </a:rPr>
+              <a:t>Identificare trend nelle vendite e nei prodotti più popolari</a:t>
+            </a:r>
+            <a:r>
+              <a:rPr lang="it-IT" sz="2000" kern="0" dirty="0">
+                <a:latin typeface="Helvetica" panose="020B0604020202020204" pitchFamily="34" charset="0"/>
+                <a:cs typeface="Helvetica" panose="020B0604020202020204" pitchFamily="34" charset="0"/>
+              </a:rPr>
+              <a:t> </a:t>
+            </a:r>
+          </a:p>
+          <a:p>
+            <a:pPr marL="342900" indent="-342900">
+              <a:lnSpc>
+                <a:spcPct val="150000"/>
+              </a:lnSpc>
+              <a:buFont typeface="Arial" panose="020B0604020202020204" pitchFamily="34" charset="0"/>
+              <a:buChar char="•"/>
+            </a:pPr>
+            <a:r>
+              <a:rPr lang="it-IT" sz="2000" dirty="0">
+                <a:latin typeface="Helvetica" panose="020B0604020202020204" pitchFamily="34" charset="0"/>
+                <a:cs typeface="Helvetica" panose="020B0604020202020204" pitchFamily="34" charset="0"/>
+              </a:rPr>
+              <a:t>Valutare tempi di consegna e performance dei venditori</a:t>
+            </a:r>
+            <a:endParaRPr lang="it-IT" sz="2000" kern="0" dirty="0">
+              <a:latin typeface="Helvetica" panose="020B0604020202020204" pitchFamily="34" charset="0"/>
+              <a:cs typeface="Helvetica" panose="020B0604020202020204" pitchFamily="34" charset="0"/>
+            </a:endParaRPr>
+          </a:p>
+          <a:p>
+            <a:pPr marL="342900" indent="-342900">
+              <a:lnSpc>
+                <a:spcPct val="150000"/>
+              </a:lnSpc>
+              <a:buFont typeface="Arial" panose="020B0604020202020204" pitchFamily="34" charset="0"/>
+              <a:buChar char="•"/>
+            </a:pPr>
+            <a:r>
+              <a:rPr lang="it-IT" sz="2000" dirty="0">
+                <a:latin typeface="Helvetica" panose="020B0604020202020204" pitchFamily="34" charset="0"/>
+                <a:cs typeface="Helvetica" panose="020B0604020202020204" pitchFamily="34" charset="0"/>
+              </a:rPr>
+              <a:t>Estrarre insight utili per strategie di marketing e logistica</a:t>
+            </a:r>
+            <a:endParaRPr lang="it-IT" sz="2000" kern="0" dirty="0">
+              <a:solidFill>
+                <a:srgbClr val="001733"/>
+              </a:solidFill>
+              <a:latin typeface="Helvetica" panose="020B0604020202020204" pitchFamily="34" charset="0"/>
+              <a:cs typeface="Helvetica" panose="020B0604020202020204" pitchFamily="34" charset="0"/>
+            </a:endParaRPr>
           </a:p>
         </p:txBody>
       </p:sp>
     </p:spTree>
     <p:extLst>
       <p:ext uri="{BB962C8B-B14F-4D97-AF65-F5344CB8AC3E}">
-        <p14:creationId xmlns:p14="http://schemas.microsoft.com/office/powerpoint/2010/main" val="2978908663"/>
+        <p14:creationId xmlns:p14="http://schemas.microsoft.com/office/powerpoint/2010/main" val="1294911732"/>
       </p:ext>
     </p:extLst>
   </p:cSld>
@@ -2179,7 +3328,7 @@
         <p:cNvPr id="1" name="">
           <a:extLst>
             <a:ext uri="{FF2B5EF4-FFF2-40B4-BE49-F238E27FC236}">
-              <a16:creationId xmlns:a16="http://schemas.microsoft.com/office/drawing/2014/main" id="{D18AAECB-2C2A-D12D-D1C2-02E9A418506C}"/>
+              <a16:creationId xmlns:a16="http://schemas.microsoft.com/office/drawing/2014/main" id="{B6377B05-D525-02D2-DE6A-66902C0379AE}"/>
             </a:ext>
           </a:extLst>
         </p:cNvPr>
@@ -2199,7 +3348,7 @@
           <p:cNvPr id="3" name="Titolo 2">
             <a:extLst>
               <a:ext uri="{FF2B5EF4-FFF2-40B4-BE49-F238E27FC236}">
-                <a16:creationId xmlns:a16="http://schemas.microsoft.com/office/drawing/2014/main" id="{3D06822A-4D47-4B9A-0015-D369DF703383}"/>
+                <a16:creationId xmlns:a16="http://schemas.microsoft.com/office/drawing/2014/main" id="{3E04C208-2FA5-6470-F29B-76626A94579E}"/>
               </a:ext>
             </a:extLst>
           </p:cNvPr>
@@ -2210,14 +3359,22 @@
             <p:ph type="title"/>
           </p:nvPr>
         </p:nvSpPr>
-        <p:spPr/>
+        <p:spPr>
+          <a:xfrm>
+            <a:off x="714933" y="792847"/>
+            <a:ext cx="10867467" cy="538609"/>
+          </a:xfrm>
+        </p:spPr>
         <p:txBody>
           <a:bodyPr/>
           <a:lstStyle/>
           <a:p>
             <a:r>
-              <a:rPr lang="it-IT" dirty="0"/>
-              <a:t>L’oggetto del lavoro e l’obbiettivo</a:t>
+              <a:rPr lang="it-IT" sz="3500" b="1" dirty="0">
+                <a:latin typeface="Helvetica" panose="020B0604020202020204" pitchFamily="34" charset="0"/>
+                <a:cs typeface="Helvetica" panose="020B0604020202020204" pitchFamily="34" charset="0"/>
+              </a:rPr>
+              <a:t>Tools per analisi e presentazione</a:t>
             </a:r>
           </a:p>
         </p:txBody>
@@ -2227,7 +3384,7 @@
           <p:cNvPr id="4" name="Segnaposto contenuto 3">
             <a:extLst>
               <a:ext uri="{FF2B5EF4-FFF2-40B4-BE49-F238E27FC236}">
-                <a16:creationId xmlns:a16="http://schemas.microsoft.com/office/drawing/2014/main" id="{A3F753B8-2CF8-CAF3-D2B6-33CD70BB6711}"/>
+                <a16:creationId xmlns:a16="http://schemas.microsoft.com/office/drawing/2014/main" id="{AA8CCFE2-6AFD-CF91-38C8-20AD4B840F29}"/>
               </a:ext>
             </a:extLst>
           </p:cNvPr>
@@ -2238,12 +3395,96 @@
             <p:ph sz="half" idx="2"/>
           </p:nvPr>
         </p:nvSpPr>
-        <p:spPr/>
+        <p:spPr>
+          <a:xfrm>
+            <a:off x="714933" y="1688664"/>
+            <a:ext cx="3779906" cy="2215991"/>
+          </a:xfrm>
+        </p:spPr>
         <p:txBody>
           <a:bodyPr/>
           <a:lstStyle/>
           <a:p>
-            <a:endParaRPr lang="it-IT"/>
+            <a:pPr algn="l">
+              <a:lnSpc>
+                <a:spcPct val="150000"/>
+              </a:lnSpc>
+            </a:pPr>
+            <a:r>
+              <a:rPr lang="it-IT" sz="2400" dirty="0">
+                <a:solidFill>
+                  <a:srgbClr val="014FEF"/>
+                </a:solidFill>
+                <a:latin typeface="Helvetica" panose="020B0604020202020204" pitchFamily="34" charset="0"/>
+                <a:ea typeface="+mj-ea"/>
+                <a:cs typeface="Helvetica" panose="020B0604020202020204" pitchFamily="34" charset="0"/>
+              </a:rPr>
+              <a:t>Visual Studio Code</a:t>
+            </a:r>
+          </a:p>
+          <a:p>
+            <a:pPr marL="342900" indent="-342900" algn="l">
+              <a:lnSpc>
+                <a:spcPct val="150000"/>
+              </a:lnSpc>
+              <a:buFont typeface="Arial" panose="020B0604020202020204" pitchFamily="34" charset="0"/>
+              <a:buChar char="•"/>
+            </a:pPr>
+            <a:r>
+              <a:rPr lang="it-IT" sz="2000" dirty="0">
+                <a:solidFill>
+                  <a:srgbClr val="001733"/>
+                </a:solidFill>
+                <a:latin typeface="Helvetica" panose="020B0604020202020204" pitchFamily="34" charset="0"/>
+                <a:cs typeface="Helvetica" panose="020B0604020202020204" pitchFamily="34" charset="0"/>
+              </a:rPr>
+              <a:t>Pulizia e preparazione dei dati</a:t>
+            </a:r>
+          </a:p>
+          <a:p>
+            <a:pPr marL="342900" indent="-342900" algn="l">
+              <a:lnSpc>
+                <a:spcPct val="150000"/>
+              </a:lnSpc>
+              <a:buFont typeface="Arial" panose="020B0604020202020204" pitchFamily="34" charset="0"/>
+              <a:buChar char="•"/>
+            </a:pPr>
+            <a:r>
+              <a:rPr lang="it-IT" sz="2000" dirty="0">
+                <a:solidFill>
+                  <a:srgbClr val="001733"/>
+                </a:solidFill>
+                <a:latin typeface="Helvetica" panose="020B0604020202020204" pitchFamily="34" charset="0"/>
+                <a:cs typeface="Helvetica" panose="020B0604020202020204" pitchFamily="34" charset="0"/>
+              </a:rPr>
+              <a:t>Test di Ipotesi</a:t>
+            </a:r>
+          </a:p>
+          <a:p>
+            <a:pPr marL="342900" indent="-342900" algn="l">
+              <a:lnSpc>
+                <a:spcPct val="150000"/>
+              </a:lnSpc>
+              <a:buFont typeface="Arial" panose="020B0604020202020204" pitchFamily="34" charset="0"/>
+              <a:buChar char="•"/>
+            </a:pPr>
+            <a:r>
+              <a:rPr lang="it-IT" sz="2000" dirty="0">
+                <a:solidFill>
+                  <a:srgbClr val="001733"/>
+                </a:solidFill>
+                <a:latin typeface="Helvetica" panose="020B0604020202020204" pitchFamily="34" charset="0"/>
+                <a:cs typeface="Helvetica" panose="020B0604020202020204" pitchFamily="34" charset="0"/>
+              </a:rPr>
+              <a:t>Regressione lineare</a:t>
+            </a:r>
+          </a:p>
+          <a:p>
+            <a:endParaRPr lang="it-IT" dirty="0">
+              <a:solidFill>
+                <a:srgbClr val="FFFFFF"/>
+              </a:solidFill>
+            </a:endParaRPr>
           </a:p>
         </p:txBody>
       </p:sp>
@@ -2252,7 +3493,7 @@
           <p:cNvPr id="5" name="Segnaposto contenuto 4">
             <a:extLst>
               <a:ext uri="{FF2B5EF4-FFF2-40B4-BE49-F238E27FC236}">
-                <a16:creationId xmlns:a16="http://schemas.microsoft.com/office/drawing/2014/main" id="{6F87302B-5C99-5ED4-F397-4958B928A718}"/>
+                <a16:creationId xmlns:a16="http://schemas.microsoft.com/office/drawing/2014/main" id="{7D91CAC1-3FC3-43E1-1406-EDE9488699B3}"/>
               </a:ext>
             </a:extLst>
           </p:cNvPr>
@@ -2263,19 +3504,195 @@
             <p:ph sz="half" idx="3"/>
           </p:nvPr>
         </p:nvSpPr>
-        <p:spPr/>
+        <p:spPr>
+          <a:xfrm>
+            <a:off x="6148666" y="1688377"/>
+            <a:ext cx="5486400" cy="5755422"/>
+          </a:xfrm>
+        </p:spPr>
         <p:txBody>
           <a:bodyPr/>
           <a:lstStyle/>
           <a:p>
-            <a:endParaRPr lang="it-IT"/>
-          </a:p>
-        </p:txBody>
-      </p:sp>
+            <a:pPr>
+              <a:lnSpc>
+                <a:spcPct val="150000"/>
+              </a:lnSpc>
+            </a:pPr>
+            <a:r>
+              <a:rPr lang="it-IT" sz="2400" dirty="0">
+                <a:solidFill>
+                  <a:srgbClr val="014FEF"/>
+                </a:solidFill>
+                <a:latin typeface="Helvetica" panose="020B0604020202020204" pitchFamily="34" charset="0"/>
+                <a:ea typeface="+mj-ea"/>
+                <a:cs typeface="Helvetica" panose="020B0604020202020204" pitchFamily="34" charset="0"/>
+              </a:rPr>
+              <a:t>Power BI</a:t>
+            </a:r>
+          </a:p>
+          <a:p>
+            <a:pPr marL="342900" indent="-342900" algn="l">
+              <a:lnSpc>
+                <a:spcPct val="150000"/>
+              </a:lnSpc>
+              <a:buFont typeface="Arial" panose="020B0604020202020204" pitchFamily="34" charset="0"/>
+              <a:buChar char="•"/>
+            </a:pPr>
+            <a:r>
+              <a:rPr lang="it-IT" sz="2000" dirty="0">
+                <a:solidFill>
+                  <a:srgbClr val="001733"/>
+                </a:solidFill>
+                <a:latin typeface="Helvetica" panose="020B0604020202020204" pitchFamily="34" charset="0"/>
+                <a:cs typeface="Helvetica" panose="020B0604020202020204" pitchFamily="34" charset="0"/>
+              </a:rPr>
+              <a:t>Creazione di dashboard interattive</a:t>
+            </a:r>
+          </a:p>
+          <a:p>
+            <a:pPr marL="342900" indent="-342900" algn="l">
+              <a:lnSpc>
+                <a:spcPct val="150000"/>
+              </a:lnSpc>
+              <a:buFont typeface="Arial" panose="020B0604020202020204" pitchFamily="34" charset="0"/>
+              <a:buChar char="•"/>
+            </a:pPr>
+            <a:r>
+              <a:rPr lang="it-IT" sz="2000" dirty="0">
+                <a:solidFill>
+                  <a:srgbClr val="001733"/>
+                </a:solidFill>
+                <a:latin typeface="Helvetica" panose="020B0604020202020204" pitchFamily="34" charset="0"/>
+                <a:cs typeface="Helvetica" panose="020B0604020202020204" pitchFamily="34" charset="0"/>
+              </a:rPr>
+              <a:t>Visualizzazione dei trend e KPI</a:t>
+            </a:r>
+          </a:p>
+          <a:p>
+            <a:pPr marL="342900" indent="-342900" algn="l">
+              <a:lnSpc>
+                <a:spcPct val="150000"/>
+              </a:lnSpc>
+              <a:buFont typeface="Arial" panose="020B0604020202020204" pitchFamily="34" charset="0"/>
+              <a:buChar char="•"/>
+            </a:pPr>
+            <a:r>
+              <a:rPr lang="it-IT" sz="2000" dirty="0">
+                <a:solidFill>
+                  <a:srgbClr val="001733"/>
+                </a:solidFill>
+                <a:latin typeface="Helvetica" panose="020B0604020202020204" pitchFamily="34" charset="0"/>
+                <a:cs typeface="Helvetica" panose="020B0604020202020204" pitchFamily="34" charset="0"/>
+              </a:rPr>
+              <a:t>Supporto alle decisioni con insight derivati dai dati</a:t>
+            </a:r>
+          </a:p>
+          <a:p>
+            <a:pPr fontAlgn="base"/>
+            <a:endParaRPr lang="it-IT" sz="2000" b="1" dirty="0">
+              <a:solidFill>
+                <a:srgbClr val="001733"/>
+              </a:solidFill>
+              <a:latin typeface="Helvetica" panose="020B0604020202020204" pitchFamily="34" charset="0"/>
+              <a:cs typeface="Helvetica" panose="020B0604020202020204" pitchFamily="34" charset="0"/>
+            </a:endParaRPr>
+          </a:p>
+          <a:p>
+            <a:pPr fontAlgn="base"/>
+            <a:endParaRPr lang="it-IT" sz="2400" b="1" dirty="0">
+              <a:solidFill>
+                <a:srgbClr val="001733"/>
+              </a:solidFill>
+            </a:endParaRPr>
+          </a:p>
+          <a:p>
+            <a:endParaRPr lang="en-US" sz="2200" dirty="0">
+              <a:solidFill>
+                <a:srgbClr val="3639EB"/>
+              </a:solidFill>
+              <a:latin typeface="Arial Black"/>
+              <a:ea typeface="+mj-ea"/>
+            </a:endParaRPr>
+          </a:p>
+          <a:p>
+            <a:endParaRPr lang="en-US" sz="2200" dirty="0">
+              <a:solidFill>
+                <a:srgbClr val="3639EB"/>
+              </a:solidFill>
+              <a:latin typeface="Arial Black"/>
+              <a:ea typeface="+mj-ea"/>
+            </a:endParaRPr>
+          </a:p>
+          <a:p>
+            <a:endParaRPr lang="en-US" sz="2200" dirty="0">
+              <a:solidFill>
+                <a:srgbClr val="001733"/>
+              </a:solidFill>
+              <a:latin typeface="Arial Black"/>
+              <a:ea typeface="+mj-ea"/>
+            </a:endParaRPr>
+          </a:p>
+          <a:p>
+            <a:endParaRPr lang="en-US" b="1" dirty="0"/>
+          </a:p>
+          <a:p>
+            <a:endParaRPr lang="en-US" b="1" dirty="0"/>
+          </a:p>
+          <a:p>
+            <a:endParaRPr lang="en-US" b="1" dirty="0"/>
+          </a:p>
+          <a:p>
+            <a:endParaRPr lang="en-US" b="1" dirty="0"/>
+          </a:p>
+          <a:p>
+            <a:endParaRPr lang="en-US" b="1" dirty="0"/>
+          </a:p>
+          <a:p>
+            <a:endParaRPr lang="it-IT" dirty="0"/>
+          </a:p>
+        </p:txBody>
+      </p:sp>
+      <p:pic>
+        <p:nvPicPr>
+          <p:cNvPr id="7" name="Immagine 6">
+            <a:extLst>
+              <a:ext uri="{FF2B5EF4-FFF2-40B4-BE49-F238E27FC236}">
+                <a16:creationId xmlns:a16="http://schemas.microsoft.com/office/drawing/2014/main" id="{7CAC4C2F-55EF-8CF7-A679-4C012E905E51}"/>
+              </a:ext>
+            </a:extLst>
+          </p:cNvPr>
+          <p:cNvPicPr>
+            <a:picLocks noChangeAspect="1"/>
+          </p:cNvPicPr>
+          <p:nvPr/>
+        </p:nvPicPr>
+        <p:blipFill>
+          <a:blip r:embed="rId3">
+            <a:extLst>
+              <a:ext uri="{28A0092B-C50C-407E-A947-70E740481C1C}">
+                <a14:useLocalDpi xmlns:a14="http://schemas.microsoft.com/office/drawing/2010/main" val="0"/>
+              </a:ext>
+            </a:extLst>
+          </a:blip>
+          <a:stretch>
+            <a:fillRect/>
+          </a:stretch>
+        </p:blipFill>
+        <p:spPr>
+          <a:xfrm>
+            <a:off x="10530225" y="4735439"/>
+            <a:ext cx="1052175" cy="1052175"/>
+          </a:xfrm>
+          <a:prstGeom prst="rect">
+            <a:avLst/>
+          </a:prstGeom>
+        </p:spPr>
+      </p:pic>
     </p:spTree>
     <p:extLst>
       <p:ext uri="{BB962C8B-B14F-4D97-AF65-F5344CB8AC3E}">
-        <p14:creationId xmlns:p14="http://schemas.microsoft.com/office/powerpoint/2010/main" val="830934297"/>
+        <p14:creationId xmlns:p14="http://schemas.microsoft.com/office/powerpoint/2010/main" val="3682781466"/>
       </p:ext>
     </p:extLst>
   </p:cSld>
@@ -2566,4 +3983,319 @@
   <a:objectDefaults/>
   <a:extraClrSchemeLst/>
 </a:theme>
+</file>
+
+<file path=ppt/theme/theme2.xml><?xml version="1.0" encoding="utf-8"?>
+<a:theme xmlns:a="http://schemas.openxmlformats.org/drawingml/2006/main" name="Office Theme">
+  <a:themeElements>
+    <a:clrScheme name="Office">
+      <a:dk1>
+        <a:sysClr val="windowText" lastClr="000000"/>
+      </a:dk1>
+      <a:lt1>
+        <a:sysClr val="window" lastClr="FFFFFF"/>
+      </a:lt1>
+      <a:dk2>
+        <a:srgbClr val="0E2841"/>
+      </a:dk2>
+      <a:lt2>
+        <a:srgbClr val="E8E8E8"/>
+      </a:lt2>
+      <a:accent1>
+        <a:srgbClr val="156082"/>
+      </a:accent1>
+      <a:accent2>
+        <a:srgbClr val="E97132"/>
+      </a:accent2>
+      <a:accent3>
+        <a:srgbClr val="196B24"/>
+      </a:accent3>
+      <a:accent4>
+        <a:srgbClr val="0F9ED5"/>
+      </a:accent4>
+      <a:accent5>
+        <a:srgbClr val="A02B93"/>
+      </a:accent5>
+      <a:accent6>
+        <a:srgbClr val="4EA72E"/>
+      </a:accent6>
+      <a:hlink>
+        <a:srgbClr val="467886"/>
+      </a:hlink>
+      <a:folHlink>
+        <a:srgbClr val="96607D"/>
+      </a:folHlink>
+    </a:clrScheme>
+    <a:fontScheme name="Office">
+      <a:majorFont>
+        <a:latin typeface="Aptos Display" panose="02110004020202020204"/>
+        <a:ea typeface=""/>
+        <a:cs typeface=""/>
+        <a:font script="Jpan" typeface="游ゴシック Light"/>
+        <a:font script="Hang" typeface="맑은 고딕"/>
+        <a:font script="Hans" typeface="等线 Light"/>
+        <a:font script="Hant" typeface="新細明體"/>
+        <a:font script="Arab" typeface="Times New Roman"/>
+        <a:font script="Hebr" typeface="Times New Roman"/>
+        <a:font script="Thai" typeface="Angsana New"/>
+        <a:font script="Ethi" typeface="Nyala"/>
+        <a:font script="Beng" typeface="Vrinda"/>
+        <a:font script="Gujr" typeface="Shruti"/>
+        <a:font script="Khmr" typeface="MoolBoran"/>
+        <a:font script="Knda" typeface="Tunga"/>
+        <a:font script="Guru" typeface="Raavi"/>
+        <a:font script="Cans" typeface="Euphemia"/>
+        <a:font script="Cher" typeface="Plantagenet Cherokee"/>
+        <a:font script="Yiii" typeface="Microsoft Yi Baiti"/>
+        <a:font script="Tibt" typeface="Microsoft Himalaya"/>
+        <a:font script="Thaa" typeface="MV Boli"/>
+        <a:font script="Deva" typeface="Mangal"/>
+        <a:font script="Telu" typeface="Gautami"/>
+        <a:font script="Taml" typeface="Latha"/>
+        <a:font script="Syrc" typeface="Estrangelo Edessa"/>
+        <a:font script="Orya" typeface="Kalinga"/>
+        <a:font script="Mlym" typeface="Kartika"/>
+        <a:font script="Laoo" typeface="DokChampa"/>
+        <a:font script="Sinh" typeface="Iskoola Pota"/>
+        <a:font script="Mong" typeface="Mongolian Baiti"/>
+        <a:font script="Viet" typeface="Times New Roman"/>
+        <a:font script="Uigh" typeface="Microsoft Uighur"/>
+        <a:font script="Geor" typeface="Sylfaen"/>
+        <a:font script="Armn" typeface="Arial"/>
+        <a:font script="Bugi" typeface="Leelawadee UI"/>
+        <a:font script="Bopo" typeface="Microsoft JhengHei"/>
+        <a:font script="Java" typeface="Javanese Text"/>
+        <a:font script="Lisu" typeface="Segoe UI"/>
+        <a:font script="Mymr" typeface="Myanmar Text"/>
+        <a:font script="Nkoo" typeface="Ebrima"/>
+        <a:font script="Olck" typeface="Nirmala UI"/>
+        <a:font script="Osma" typeface="Ebrima"/>
+        <a:font script="Phag" typeface="Phagspa"/>
+        <a:font script="Syrn" typeface="Estrangelo Edessa"/>
+        <a:font script="Syrj" typeface="Estrangelo Edessa"/>
+        <a:font script="Syre" typeface="Estrangelo Edessa"/>
+        <a:font script="Sora" typeface="Nirmala UI"/>
+        <a:font script="Tale" typeface="Microsoft Tai Le"/>
+        <a:font script="Talu" typeface="Microsoft New Tai Lue"/>
+        <a:font script="Tfng" typeface="Ebrima"/>
+      </a:majorFont>
+      <a:minorFont>
+        <a:latin typeface="Aptos" panose="02110004020202020204"/>
+        <a:ea typeface=""/>
+        <a:cs typeface=""/>
+        <a:font script="Jpan" typeface="游ゴシック"/>
+        <a:font script="Hang" typeface="맑은 고딕"/>
+        <a:font script="Hans" typeface="等线"/>
+        <a:font script="Hant" typeface="新細明體"/>
+        <a:font script="Arab" typeface="Arial"/>
+        <a:font script="Hebr" typeface="Arial"/>
+        <a:font script="Thai" typeface="Cordia New"/>
+        <a:font script="Ethi" typeface="Nyala"/>
+        <a:font script="Beng" typeface="Vrinda"/>
+        <a:font script="Gujr" typeface="Shruti"/>
+        <a:font script="Khmr" typeface="DaunPenh"/>
+        <a:font script="Knda" typeface="Tunga"/>
+        <a:font script="Guru" typeface="Raavi"/>
+        <a:font script="Cans" typeface="Euphemia"/>
+        <a:font script="Cher" typeface="Plantagenet Cherokee"/>
+        <a:font script="Yiii" typeface="Microsoft Yi Baiti"/>
+        <a:font script="Tibt" typeface="Microsoft Himalaya"/>
+        <a:font script="Thaa" typeface="MV Boli"/>
+        <a:font script="Deva" typeface="Mangal"/>
+        <a:font script="Telu" typeface="Gautami"/>
+        <a:font script="Taml" typeface="Latha"/>
+        <a:font script="Syrc" typeface="Estrangelo Edessa"/>
+        <a:font script="Orya" typeface="Kalinga"/>
+        <a:font script="Mlym" typeface="Kartika"/>
+        <a:font script="Laoo" typeface="DokChampa"/>
+        <a:font script="Sinh" typeface="Iskoola Pota"/>
+        <a:font script="Mong" typeface="Mongolian Baiti"/>
+        <a:font script="Viet" typeface="Arial"/>
+        <a:font script="Uigh" typeface="Microsoft Uighur"/>
+        <a:font script="Geor" typeface="Sylfaen"/>
+        <a:font script="Armn" typeface="Arial"/>
+        <a:font script="Bugi" typeface="Leelawadee UI"/>
+        <a:font script="Bopo" typeface="Microsoft JhengHei"/>
+        <a:font script="Java" typeface="Javanese Text"/>
+        <a:font script="Lisu" typeface="Segoe UI"/>
+        <a:font script="Mymr" typeface="Myanmar Text"/>
+        <a:font script="Nkoo" typeface="Ebrima"/>
+        <a:font script="Olck" typeface="Nirmala UI"/>
+        <a:font script="Osma" typeface="Ebrima"/>
+        <a:font script="Phag" typeface="Phagspa"/>
+        <a:font script="Syrn" typeface="Estrangelo Edessa"/>
+        <a:font script="Syrj" typeface="Estrangelo Edessa"/>
+        <a:font script="Syre" typeface="Estrangelo Edessa"/>
+        <a:font script="Sora" typeface="Nirmala UI"/>
+        <a:font script="Tale" typeface="Microsoft Tai Le"/>
+        <a:font script="Talu" typeface="Microsoft New Tai Lue"/>
+        <a:font script="Tfng" typeface="Ebrima"/>
+      </a:minorFont>
+    </a:fontScheme>
+    <a:fmtScheme name="Office">
+      <a:fillStyleLst>
+        <a:solidFill>
+          <a:schemeClr val="phClr"/>
+        </a:solidFill>
+        <a:gradFill rotWithShape="1">
+          <a:gsLst>
+            <a:gs pos="0">
+              <a:schemeClr val="phClr">
+                <a:lumMod val="110000"/>
+                <a:satMod val="105000"/>
+                <a:tint val="67000"/>
+              </a:schemeClr>
+            </a:gs>
+            <a:gs pos="50000">
+              <a:schemeClr val="phClr">
+                <a:lumMod val="105000"/>
+                <a:satMod val="103000"/>
+                <a:tint val="73000"/>
+              </a:schemeClr>
+            </a:gs>
+            <a:gs pos="100000">
+              <a:schemeClr val="phClr">
+                <a:lumMod val="105000"/>
+                <a:satMod val="109000"/>
+                <a:tint val="81000"/>
+              </a:schemeClr>
+            </a:gs>
+          </a:gsLst>
+          <a:lin ang="5400000" scaled="0"/>
+        </a:gradFill>
+        <a:gradFill rotWithShape="1">
+          <a:gsLst>
+            <a:gs pos="0">
+              <a:schemeClr val="phClr">
+                <a:satMod val="103000"/>
+                <a:lumMod val="102000"/>
+                <a:tint val="94000"/>
+              </a:schemeClr>
+            </a:gs>
+            <a:gs pos="50000">
+              <a:schemeClr val="phClr">
+                <a:satMod val="110000"/>
+                <a:lumMod val="100000"/>
+                <a:shade val="100000"/>
+              </a:schemeClr>
+            </a:gs>
+            <a:gs pos="100000">
+              <a:schemeClr val="phClr">
+                <a:lumMod val="99000"/>
+                <a:satMod val="120000"/>
+                <a:shade val="78000"/>
+              </a:schemeClr>
+            </a:gs>
+          </a:gsLst>
+          <a:lin ang="5400000" scaled="0"/>
+        </a:gradFill>
+      </a:fillStyleLst>
+      <a:lnStyleLst>
+        <a:ln w="12700" cap="flat" cmpd="sng" algn="ctr">
+          <a:solidFill>
+            <a:schemeClr val="phClr"/>
+          </a:solidFill>
+          <a:prstDash val="solid"/>
+          <a:miter lim="800000"/>
+        </a:ln>
+        <a:ln w="19050" cap="flat" cmpd="sng" algn="ctr">
+          <a:solidFill>
+            <a:schemeClr val="phClr"/>
+          </a:solidFill>
+          <a:prstDash val="solid"/>
+          <a:miter lim="800000"/>
+        </a:ln>
+        <a:ln w="25400" cap="flat" cmpd="sng" algn="ctr">
+          <a:solidFill>
+            <a:schemeClr val="phClr"/>
+          </a:solidFill>
+          <a:prstDash val="solid"/>
+          <a:miter lim="800000"/>
+        </a:ln>
+      </a:lnStyleLst>
+      <a:effectStyleLst>
+        <a:effectStyle>
+          <a:effectLst/>
+        </a:effectStyle>
+        <a:effectStyle>
+          <a:effectLst/>
+        </a:effectStyle>
+        <a:effectStyle>
+          <a:effectLst>
+            <a:outerShdw blurRad="57150" dist="19050" dir="5400000" algn="ctr" rotWithShape="0">
+              <a:srgbClr val="000000">
+                <a:alpha val="63000"/>
+              </a:srgbClr>
+            </a:outerShdw>
+          </a:effectLst>
+        </a:effectStyle>
+      </a:effectStyleLst>
+      <a:bgFillStyleLst>
+        <a:solidFill>
+          <a:schemeClr val="phClr"/>
+        </a:solidFill>
+        <a:solidFill>
+          <a:schemeClr val="phClr">
+            <a:tint val="95000"/>
+            <a:satMod val="170000"/>
+          </a:schemeClr>
+        </a:solidFill>
+        <a:gradFill rotWithShape="1">
+          <a:gsLst>
+            <a:gs pos="0">
+              <a:schemeClr val="phClr">
+                <a:tint val="93000"/>
+                <a:satMod val="150000"/>
+                <a:shade val="98000"/>
+                <a:lumMod val="102000"/>
+              </a:schemeClr>
+            </a:gs>
+            <a:gs pos="50000">
+              <a:schemeClr val="phClr">
+                <a:tint val="98000"/>
+                <a:satMod val="130000"/>
+                <a:shade val="90000"/>
+                <a:lumMod val="103000"/>
+              </a:schemeClr>
+            </a:gs>
+            <a:gs pos="100000">
+              <a:schemeClr val="phClr">
+                <a:shade val="63000"/>
+                <a:satMod val="120000"/>
+              </a:schemeClr>
+            </a:gs>
+          </a:gsLst>
+          <a:lin ang="5400000" scaled="0"/>
+        </a:gradFill>
+      </a:bgFillStyleLst>
+    </a:fmtScheme>
+  </a:themeElements>
+  <a:objectDefaults>
+    <a:lnDef>
+      <a:spPr/>
+      <a:bodyPr/>
+      <a:lstStyle/>
+      <a:style>
+        <a:lnRef idx="2">
+          <a:schemeClr val="accent1"/>
+        </a:lnRef>
+        <a:fillRef idx="0">
+          <a:schemeClr val="accent1"/>
+        </a:fillRef>
+        <a:effectRef idx="1">
+          <a:schemeClr val="accent1"/>
+        </a:effectRef>
+        <a:fontRef idx="minor">
+          <a:schemeClr val="tx1"/>
+        </a:fontRef>
+      </a:style>
+    </a:lnDef>
+  </a:objectDefaults>
+  <a:extraClrSchemeLst/>
+  <a:extLst>
+    <a:ext uri="{05A4C25C-085E-4340-85A3-A5531E510DB2}">
+      <thm15:themeFamily xmlns:thm15="http://schemas.microsoft.com/office/thememl/2012/main" name="Office Theme" id="{2E142A2C-CD16-42D6-873A-C26D2A0506FA}" vid="{1BDDFF52-6CD6-40A5-AB3C-68EB2F1E4D0A}"/>
+    </a:ext>
+  </a:extLst>
+</a:theme>
 </file>